--- a/GenAI/wk4_embedding_vectorDB_SemanticSearch_RAG_OpenAI/3_vectorDB_chunking.pptx
+++ b/GenAI/wk4_embedding_vectorDB_SemanticSearch_RAG_OpenAI/3_vectorDB_chunking.pptx
@@ -7,9 +7,6 @@
   <p:notesMasterIdLst>
     <p:notesMasterId r:id="rId11"/>
   </p:notesMasterIdLst>
-  <p:handoutMasterIdLst>
-    <p:handoutMasterId r:id="rId12"/>
-  </p:handoutMasterIdLst>
   <p:sldIdLst>
     <p:sldId id="257" r:id="rId2"/>
     <p:sldId id="276" r:id="rId3"/>
@@ -122,200 +119,8 @@
     <p:ext uri="{EFAFB233-063F-42B5-8137-9DF3F51BA10A}">
       <p15:sldGuideLst xmlns:p15="http://schemas.microsoft.com/office/powerpoint/2012/main"/>
     </p:ext>
-    <p:ext uri="{2D200454-40CA-4A62-9FC3-DE9A4176ACB9}">
-      <p15:notesGuideLst xmlns:p15="http://schemas.microsoft.com/office/powerpoint/2012/main"/>
-    </p:ext>
   </p:extLst>
 </p:presentation>
-</file>
-
-<file path=ppt/handoutMasters/handoutMaster1.xml><?xml version="1.0" encoding="utf-8"?>
-<p:handoutMaster xmlns:a="http://schemas.openxmlformats.org/drawingml/2006/main" xmlns:r="http://schemas.openxmlformats.org/officeDocument/2006/relationships" xmlns:p="http://schemas.openxmlformats.org/presentationml/2006/main">
-  <p:cSld>
-    <p:bg>
-      <p:bgRef idx="1001">
-        <a:schemeClr val="bg1"/>
-      </p:bgRef>
-    </p:bg>
-    <p:spTree>
-      <p:nvGrpSpPr>
-        <p:cNvPr id="1" name=""/>
-        <p:cNvGrpSpPr/>
-        <p:nvPr/>
-      </p:nvGrpSpPr>
-      <p:grpSpPr>
-        <a:xfrm>
-          <a:off x="0" y="0"/>
-          <a:ext cx="0" cy="0"/>
-          <a:chOff x="0" y="0"/>
-          <a:chExt cx="0" cy="0"/>
-        </a:xfrm>
-      </p:grpSpPr>
-      <p:sp>
-        <p:nvSpPr>
-          <p:cNvPr id="2" name="Header Placeholder 1">
-            <a:extLst>
-              <a:ext uri="{FF2B5EF4-FFF2-40B4-BE49-F238E27FC236}">
-                <a16:creationId xmlns:a16="http://schemas.microsoft.com/office/drawing/2014/main" id="{1ACA3A45-07AA-881E-EBAC-FAE1FFF9B3BB}"/>
-              </a:ext>
-            </a:extLst>
-          </p:cNvPr>
-          <p:cNvSpPr>
-            <a:spLocks noGrp="1"/>
-          </p:cNvSpPr>
-          <p:nvPr>
-            <p:ph type="hdr" sz="quarter"/>
-          </p:nvPr>
-        </p:nvSpPr>
-        <p:spPr>
-          <a:xfrm>
-            <a:off x="0" y="0"/>
-            <a:ext cx="2971800" cy="458788"/>
-          </a:xfrm>
-          <a:prstGeom prst="rect">
-            <a:avLst/>
-          </a:prstGeom>
-        </p:spPr>
-        <p:txBody>
-          <a:bodyPr vert="horz" lIns="91440" tIns="45720" rIns="91440" bIns="45720" rtlCol="0"/>
-          <a:lstStyle>
-            <a:lvl1pPr algn="l">
-              <a:defRPr sz="1200"/>
-            </a:lvl1pPr>
-          </a:lstStyle>
-          <a:p>
-            <a:endParaRPr lang="en-US"/>
-          </a:p>
-        </p:txBody>
-      </p:sp>
-      <p:sp>
-        <p:nvSpPr>
-          <p:cNvPr id="3" name="Date Placeholder 2">
-            <a:extLst>
-              <a:ext uri="{FF2B5EF4-FFF2-40B4-BE49-F238E27FC236}">
-                <a16:creationId xmlns:a16="http://schemas.microsoft.com/office/drawing/2014/main" id="{B72C2385-62BD-1B9C-A617-554DDB21E0F4}"/>
-              </a:ext>
-            </a:extLst>
-          </p:cNvPr>
-          <p:cNvSpPr>
-            <a:spLocks noGrp="1"/>
-          </p:cNvSpPr>
-          <p:nvPr>
-            <p:ph type="dt" sz="quarter" idx="1"/>
-          </p:nvPr>
-        </p:nvSpPr>
-        <p:spPr>
-          <a:xfrm>
-            <a:off x="3884613" y="0"/>
-            <a:ext cx="2971800" cy="458788"/>
-          </a:xfrm>
-          <a:prstGeom prst="rect">
-            <a:avLst/>
-          </a:prstGeom>
-        </p:spPr>
-        <p:txBody>
-          <a:bodyPr vert="horz" lIns="91440" tIns="45720" rIns="91440" bIns="45720" rtlCol="0"/>
-          <a:lstStyle>
-            <a:lvl1pPr algn="r">
-              <a:defRPr sz="1200"/>
-            </a:lvl1pPr>
-          </a:lstStyle>
-          <a:p>
-            <a:fld id="{7BAEECA8-D063-486F-AE31-5020270C1449}" type="datetimeFigureOut">
-              <a:rPr lang="en-US" smtClean="0"/>
-              <a:t>9/13/2026</a:t>
-            </a:fld>
-            <a:endParaRPr lang="en-US"/>
-          </a:p>
-        </p:txBody>
-      </p:sp>
-      <p:sp>
-        <p:nvSpPr>
-          <p:cNvPr id="4" name="Footer Placeholder 3">
-            <a:extLst>
-              <a:ext uri="{FF2B5EF4-FFF2-40B4-BE49-F238E27FC236}">
-                <a16:creationId xmlns:a16="http://schemas.microsoft.com/office/drawing/2014/main" id="{C5328A6F-7933-1F9C-E9F6-B4A61026FBA4}"/>
-              </a:ext>
-            </a:extLst>
-          </p:cNvPr>
-          <p:cNvSpPr>
-            <a:spLocks noGrp="1"/>
-          </p:cNvSpPr>
-          <p:nvPr>
-            <p:ph type="ftr" sz="quarter" idx="2"/>
-          </p:nvPr>
-        </p:nvSpPr>
-        <p:spPr>
-          <a:xfrm>
-            <a:off x="0" y="8685213"/>
-            <a:ext cx="2971800" cy="458787"/>
-          </a:xfrm>
-          <a:prstGeom prst="rect">
-            <a:avLst/>
-          </a:prstGeom>
-        </p:spPr>
-        <p:txBody>
-          <a:bodyPr vert="horz" lIns="91440" tIns="45720" rIns="91440" bIns="45720" rtlCol="0" anchor="b"/>
-          <a:lstStyle>
-            <a:lvl1pPr algn="l">
-              <a:defRPr sz="1200"/>
-            </a:lvl1pPr>
-          </a:lstStyle>
-          <a:p>
-            <a:endParaRPr lang="en-US"/>
-          </a:p>
-        </p:txBody>
-      </p:sp>
-      <p:sp>
-        <p:nvSpPr>
-          <p:cNvPr id="5" name="Slide Number Placeholder 4">
-            <a:extLst>
-              <a:ext uri="{FF2B5EF4-FFF2-40B4-BE49-F238E27FC236}">
-                <a16:creationId xmlns:a16="http://schemas.microsoft.com/office/drawing/2014/main" id="{66F9A57F-3A38-6EDA-B76D-A3DB4F6978A7}"/>
-              </a:ext>
-            </a:extLst>
-          </p:cNvPr>
-          <p:cNvSpPr>
-            <a:spLocks noGrp="1"/>
-          </p:cNvSpPr>
-          <p:nvPr>
-            <p:ph type="sldNum" sz="quarter" idx="3"/>
-          </p:nvPr>
-        </p:nvSpPr>
-        <p:spPr>
-          <a:xfrm>
-            <a:off x="3884613" y="8685213"/>
-            <a:ext cx="2971800" cy="458787"/>
-          </a:xfrm>
-          <a:prstGeom prst="rect">
-            <a:avLst/>
-          </a:prstGeom>
-        </p:spPr>
-        <p:txBody>
-          <a:bodyPr vert="horz" lIns="91440" tIns="45720" rIns="91440" bIns="45720" rtlCol="0" anchor="b"/>
-          <a:lstStyle>
-            <a:lvl1pPr algn="r">
-              <a:defRPr sz="1200"/>
-            </a:lvl1pPr>
-          </a:lstStyle>
-          <a:p>
-            <a:fld id="{5793F6CE-D1D9-4B7B-9040-C7CAC074A6CE}" type="slidenum">
-              <a:rPr lang="en-US" smtClean="0"/>
-              <a:t>‹#›</a:t>
-            </a:fld>
-            <a:endParaRPr lang="en-US"/>
-          </a:p>
-        </p:txBody>
-      </p:sp>
-    </p:spTree>
-    <p:extLst>
-      <p:ext uri="{BB962C8B-B14F-4D97-AF65-F5344CB8AC3E}">
-        <p14:creationId xmlns:p14="http://schemas.microsoft.com/office/powerpoint/2010/main" val="397613359"/>
-      </p:ext>
-    </p:extLst>
-  </p:cSld>
-  <p:clrMap bg1="lt1" tx1="dk1" bg2="lt2" tx2="dk2" accent1="accent1" accent2="accent2" accent3="accent3" accent4="accent4" accent5="accent5" accent6="accent6" hlink="hlink" folHlink="folHlink"/>
-</p:handoutMaster>
 </file>
 
 <file path=ppt/ink/ink1.xml><?xml version="1.0" encoding="utf-8"?>
@@ -1131,7 +936,7 @@
             </a:lvl1pPr>
           </a:lstStyle>
           <a:p>
-            <a:endParaRPr lang="en-US"/>
+            <a:endParaRPr lang="en-IN"/>
           </a:p>
         </p:txBody>
       </p:sp>
@@ -1162,11 +967,11 @@
             </a:lvl1pPr>
           </a:lstStyle>
           <a:p>
-            <a:fld id="{CB233BD1-3BA8-448D-9D08-7846095EA517}" type="datetimeFigureOut">
-              <a:rPr lang="en-US" smtClean="0"/>
-              <a:t>9/13/2026</a:t>
+            <a:fld id="{175B9DE0-307C-44AA-9A14-2F76096277F0}" type="datetimeFigureOut">
+              <a:rPr lang="en-IN" smtClean="0"/>
+              <a:t>02-10-2026</a:t>
             </a:fld>
-            <a:endParaRPr lang="en-US"/>
+            <a:endParaRPr lang="en-IN"/>
           </a:p>
         </p:txBody>
       </p:sp>
@@ -1199,7 +1004,7 @@
           <a:bodyPr vert="horz" lIns="91440" tIns="45720" rIns="91440" bIns="45720" rtlCol="0" anchor="ctr"/>
           <a:lstStyle/>
           <a:p>
-            <a:endParaRPr lang="en-US"/>
+            <a:endParaRPr lang="en-IN"/>
           </a:p>
         </p:txBody>
       </p:sp>
@@ -1259,6 +1064,7 @@
               <a:rPr lang="en-US"/>
               <a:t>Fifth level</a:t>
             </a:r>
+            <a:endParaRPr lang="en-IN"/>
           </a:p>
         </p:txBody>
       </p:sp>
@@ -1289,7 +1095,7 @@
             </a:lvl1pPr>
           </a:lstStyle>
           <a:p>
-            <a:endParaRPr lang="en-US"/>
+            <a:endParaRPr lang="en-IN"/>
           </a:p>
         </p:txBody>
       </p:sp>
@@ -1320,18 +1126,18 @@
             </a:lvl1pPr>
           </a:lstStyle>
           <a:p>
-            <a:fld id="{6C63499C-1FAC-4F66-96F8-6DA2CC28B748}" type="slidenum">
-              <a:rPr lang="en-US" smtClean="0"/>
+            <a:fld id="{78143FF3-6C40-4107-91BB-30F1D3636FBF}" type="slidenum">
+              <a:rPr lang="en-IN" smtClean="0"/>
               <a:t>‹#›</a:t>
             </a:fld>
-            <a:endParaRPr lang="en-US"/>
+            <a:endParaRPr lang="en-IN"/>
           </a:p>
         </p:txBody>
       </p:sp>
     </p:spTree>
     <p:extLst>
       <p:ext uri="{BB962C8B-B14F-4D97-AF65-F5344CB8AC3E}">
-        <p14:creationId xmlns:p14="http://schemas.microsoft.com/office/powerpoint/2010/main" val="817539779"/>
+        <p14:creationId xmlns:p14="http://schemas.microsoft.com/office/powerpoint/2010/main" val="2259534446"/>
       </p:ext>
     </p:extLst>
   </p:cSld>
@@ -1434,6 +1240,14 @@
 <file path=ppt/slideLayouts/slideLayout1.xml><?xml version="1.0" encoding="utf-8"?>
 <p:sldLayout xmlns:a="http://schemas.openxmlformats.org/drawingml/2006/main" xmlns:r="http://schemas.openxmlformats.org/officeDocument/2006/relationships" xmlns:p="http://schemas.openxmlformats.org/presentationml/2006/main" type="title" preserve="1">
   <p:cSld name="Title Slide">
+    <p:bg>
+      <p:bgPr>
+        <a:solidFill>
+          <a:schemeClr val="tx1"/>
+        </a:solidFill>
+        <a:effectLst/>
+      </p:bgPr>
+    </p:bg>
     <p:spTree>
       <p:nvGrpSpPr>
         <p:cNvPr id="1" name=""/>
@@ -1453,7 +1267,7 @@
           <p:cNvPr id="2" name="Title 1">
             <a:extLst>
               <a:ext uri="{FF2B5EF4-FFF2-40B4-BE49-F238E27FC236}">
-                <a16:creationId xmlns:a16="http://schemas.microsoft.com/office/drawing/2014/main" id="{65EB0F26-247A-F2E0-8FBA-6EA7974D69E5}"/>
+                <a16:creationId xmlns:a16="http://schemas.microsoft.com/office/drawing/2014/main" id="{2C8A318F-F6FC-6CB9-CEC6-8B2C0F5EE227}"/>
               </a:ext>
             </a:extLst>
           </p:cNvPr>
@@ -1482,6 +1296,7 @@
               <a:rPr lang="en-US"/>
               <a:t>Click to edit Master title style</a:t>
             </a:r>
+            <a:endParaRPr lang="en-IN"/>
           </a:p>
         </p:txBody>
       </p:sp>
@@ -1490,7 +1305,7 @@
           <p:cNvPr id="3" name="Subtitle 2">
             <a:extLst>
               <a:ext uri="{FF2B5EF4-FFF2-40B4-BE49-F238E27FC236}">
-                <a16:creationId xmlns:a16="http://schemas.microsoft.com/office/drawing/2014/main" id="{F394F308-CEE8-92BC-D91A-4212DEA015D6}"/>
+                <a16:creationId xmlns:a16="http://schemas.microsoft.com/office/drawing/2014/main" id="{E7F8D7EB-E762-144D-1496-74683313656C}"/>
               </a:ext>
             </a:extLst>
           </p:cNvPr>
@@ -1552,6 +1367,7 @@
               <a:rPr lang="en-US"/>
               <a:t>Click to edit Master subtitle style</a:t>
             </a:r>
+            <a:endParaRPr lang="en-IN"/>
           </a:p>
         </p:txBody>
       </p:sp>
@@ -1560,7 +1376,7 @@
           <p:cNvPr id="4" name="Date Placeholder 3">
             <a:extLst>
               <a:ext uri="{FF2B5EF4-FFF2-40B4-BE49-F238E27FC236}">
-                <a16:creationId xmlns:a16="http://schemas.microsoft.com/office/drawing/2014/main" id="{B32794D3-11DF-A675-8D28-EC65EF27521E}"/>
+                <a16:creationId xmlns:a16="http://schemas.microsoft.com/office/drawing/2014/main" id="{B7756C53-114C-E36A-EC7E-AEE4C2084ABF}"/>
               </a:ext>
             </a:extLst>
           </p:cNvPr>
@@ -1576,11 +1392,11 @@
           <a:bodyPr/>
           <a:lstStyle/>
           <a:p>
-            <a:fld id="{6383FAE1-13DE-4511-8C1B-C8AFB720664C}" type="datetimeFigureOut">
-              <a:rPr lang="en-US" smtClean="0"/>
-              <a:t>9/13/2026</a:t>
+            <a:fld id="{6EBA79C2-4FE3-4D0C-AFFB-D4FCE050D5EA}" type="datetimeFigureOut">
+              <a:rPr lang="en-IN" smtClean="0"/>
+              <a:t>02-10-2026</a:t>
             </a:fld>
-            <a:endParaRPr lang="en-US"/>
+            <a:endParaRPr lang="en-IN"/>
           </a:p>
         </p:txBody>
       </p:sp>
@@ -1589,7 +1405,7 @@
           <p:cNvPr id="5" name="Footer Placeholder 4">
             <a:extLst>
               <a:ext uri="{FF2B5EF4-FFF2-40B4-BE49-F238E27FC236}">
-                <a16:creationId xmlns:a16="http://schemas.microsoft.com/office/drawing/2014/main" id="{EC53FDAF-B83A-AE0A-B811-B7195D37FDD4}"/>
+                <a16:creationId xmlns:a16="http://schemas.microsoft.com/office/drawing/2014/main" id="{D76CC798-66E8-807B-3021-DC717C7ABB7D}"/>
               </a:ext>
             </a:extLst>
           </p:cNvPr>
@@ -1605,7 +1421,7 @@
           <a:bodyPr/>
           <a:lstStyle/>
           <a:p>
-            <a:endParaRPr lang="en-US"/>
+            <a:endParaRPr lang="en-IN"/>
           </a:p>
         </p:txBody>
       </p:sp>
@@ -1614,7 +1430,7 @@
           <p:cNvPr id="6" name="Slide Number Placeholder 5">
             <a:extLst>
               <a:ext uri="{FF2B5EF4-FFF2-40B4-BE49-F238E27FC236}">
-                <a16:creationId xmlns:a16="http://schemas.microsoft.com/office/drawing/2014/main" id="{149530BD-9515-D107-426C-B72742CBF0BF}"/>
+                <a16:creationId xmlns:a16="http://schemas.microsoft.com/office/drawing/2014/main" id="{8FAA2714-B223-D201-168E-C22AD16013D1}"/>
               </a:ext>
             </a:extLst>
           </p:cNvPr>
@@ -1630,18 +1446,55 @@
           <a:bodyPr/>
           <a:lstStyle/>
           <a:p>
-            <a:fld id="{81BC7A09-79EE-44A0-8F92-750D7C83D871}" type="slidenum">
-              <a:rPr lang="en-US" smtClean="0"/>
+            <a:fld id="{023A53CF-6AA3-4EF6-9F05-A0E3059C583D}" type="slidenum">
+              <a:rPr lang="en-IN" smtClean="0"/>
               <a:t>‹#›</a:t>
             </a:fld>
-            <a:endParaRPr lang="en-US"/>
-          </a:p>
-        </p:txBody>
-      </p:sp>
+            <a:endParaRPr lang="en-IN"/>
+          </a:p>
+        </p:txBody>
+      </p:sp>
+      <p:pic>
+        <p:nvPicPr>
+          <p:cNvPr id="8" name="Picture 7">
+            <a:extLst>
+              <a:ext uri="{FF2B5EF4-FFF2-40B4-BE49-F238E27FC236}">
+                <a16:creationId xmlns:a16="http://schemas.microsoft.com/office/drawing/2014/main" id="{B14F047B-8F92-089C-65A3-54359B3F76C4}"/>
+              </a:ext>
+            </a:extLst>
+          </p:cNvPr>
+          <p:cNvPicPr>
+            <a:picLocks noChangeAspect="1"/>
+          </p:cNvPicPr>
+          <p:nvPr userDrawn="1"/>
+        </p:nvPicPr>
+        <p:blipFill>
+          <a:blip r:embed="rId2">
+            <a:alphaModFix amt="68000"/>
+            <a:extLst>
+              <a:ext uri="{28A0092B-C50C-407E-A947-70E740481C1C}">
+                <a14:useLocalDpi xmlns:a14="http://schemas.microsoft.com/office/drawing/2010/main" val="0"/>
+              </a:ext>
+            </a:extLst>
+          </a:blip>
+          <a:stretch>
+            <a:fillRect/>
+          </a:stretch>
+        </p:blipFill>
+        <p:spPr>
+          <a:xfrm>
+            <a:off x="10857778" y="0"/>
+            <a:ext cx="1295581" cy="924054"/>
+          </a:xfrm>
+          <a:prstGeom prst="rect">
+            <a:avLst/>
+          </a:prstGeom>
+        </p:spPr>
+      </p:pic>
     </p:spTree>
     <p:extLst>
       <p:ext uri="{BB962C8B-B14F-4D97-AF65-F5344CB8AC3E}">
-        <p14:creationId xmlns:p14="http://schemas.microsoft.com/office/powerpoint/2010/main" val="1449282697"/>
+        <p14:creationId xmlns:p14="http://schemas.microsoft.com/office/powerpoint/2010/main" val="480681030"/>
       </p:ext>
     </p:extLst>
   </p:cSld>
@@ -1673,7 +1526,7 @@
           <p:cNvPr id="2" name="Title 1">
             <a:extLst>
               <a:ext uri="{FF2B5EF4-FFF2-40B4-BE49-F238E27FC236}">
-                <a16:creationId xmlns:a16="http://schemas.microsoft.com/office/drawing/2014/main" id="{A8B3002A-A21A-4F99-1BCE-F61C85D7B652}"/>
+                <a16:creationId xmlns:a16="http://schemas.microsoft.com/office/drawing/2014/main" id="{1C53211F-A80A-9BAC-AAEC-067CCDA5C0CB}"/>
               </a:ext>
             </a:extLst>
           </p:cNvPr>
@@ -1693,6 +1546,7 @@
               <a:rPr lang="en-US"/>
               <a:t>Click to edit Master title style</a:t>
             </a:r>
+            <a:endParaRPr lang="en-IN"/>
           </a:p>
         </p:txBody>
       </p:sp>
@@ -1701,7 +1555,7 @@
           <p:cNvPr id="3" name="Vertical Text Placeholder 2">
             <a:extLst>
               <a:ext uri="{FF2B5EF4-FFF2-40B4-BE49-F238E27FC236}">
-                <a16:creationId xmlns:a16="http://schemas.microsoft.com/office/drawing/2014/main" id="{50E85D03-9A7F-4A9E-379E-2DEA86D21FC4}"/>
+                <a16:creationId xmlns:a16="http://schemas.microsoft.com/office/drawing/2014/main" id="{538AD45D-5A88-1664-D692-069F5C5D1AC8}"/>
               </a:ext>
             </a:extLst>
           </p:cNvPr>
@@ -1750,6 +1604,7 @@
               <a:rPr lang="en-US"/>
               <a:t>Fifth level</a:t>
             </a:r>
+            <a:endParaRPr lang="en-IN"/>
           </a:p>
         </p:txBody>
       </p:sp>
@@ -1758,7 +1613,7 @@
           <p:cNvPr id="4" name="Date Placeholder 3">
             <a:extLst>
               <a:ext uri="{FF2B5EF4-FFF2-40B4-BE49-F238E27FC236}">
-                <a16:creationId xmlns:a16="http://schemas.microsoft.com/office/drawing/2014/main" id="{DFDEEFB4-95FB-FEDD-75E7-143E7ED29C8A}"/>
+                <a16:creationId xmlns:a16="http://schemas.microsoft.com/office/drawing/2014/main" id="{6B32EEB4-BA21-8613-2094-72EEFB7929B4}"/>
               </a:ext>
             </a:extLst>
           </p:cNvPr>
@@ -1774,11 +1629,11 @@
           <a:bodyPr/>
           <a:lstStyle/>
           <a:p>
-            <a:fld id="{6383FAE1-13DE-4511-8C1B-C8AFB720664C}" type="datetimeFigureOut">
-              <a:rPr lang="en-US" smtClean="0"/>
-              <a:t>9/13/2026</a:t>
+            <a:fld id="{6EBA79C2-4FE3-4D0C-AFFB-D4FCE050D5EA}" type="datetimeFigureOut">
+              <a:rPr lang="en-IN" smtClean="0"/>
+              <a:t>02-10-2026</a:t>
             </a:fld>
-            <a:endParaRPr lang="en-US"/>
+            <a:endParaRPr lang="en-IN"/>
           </a:p>
         </p:txBody>
       </p:sp>
@@ -1787,7 +1642,7 @@
           <p:cNvPr id="5" name="Footer Placeholder 4">
             <a:extLst>
               <a:ext uri="{FF2B5EF4-FFF2-40B4-BE49-F238E27FC236}">
-                <a16:creationId xmlns:a16="http://schemas.microsoft.com/office/drawing/2014/main" id="{F1BCE0D7-1712-FF0C-D965-BFD5AE1610F2}"/>
+                <a16:creationId xmlns:a16="http://schemas.microsoft.com/office/drawing/2014/main" id="{A9ECE1A2-6F93-B3CC-3837-CD60E48CFFC9}"/>
               </a:ext>
             </a:extLst>
           </p:cNvPr>
@@ -1803,7 +1658,7 @@
           <a:bodyPr/>
           <a:lstStyle/>
           <a:p>
-            <a:endParaRPr lang="en-US"/>
+            <a:endParaRPr lang="en-IN"/>
           </a:p>
         </p:txBody>
       </p:sp>
@@ -1812,7 +1667,7 @@
           <p:cNvPr id="6" name="Slide Number Placeholder 5">
             <a:extLst>
               <a:ext uri="{FF2B5EF4-FFF2-40B4-BE49-F238E27FC236}">
-                <a16:creationId xmlns:a16="http://schemas.microsoft.com/office/drawing/2014/main" id="{932632A1-4243-F65B-A2B0-3F2142C3415D}"/>
+                <a16:creationId xmlns:a16="http://schemas.microsoft.com/office/drawing/2014/main" id="{3BE5D015-61E2-E514-FC97-B282920D9867}"/>
               </a:ext>
             </a:extLst>
           </p:cNvPr>
@@ -1828,18 +1683,18 @@
           <a:bodyPr/>
           <a:lstStyle/>
           <a:p>
-            <a:fld id="{81BC7A09-79EE-44A0-8F92-750D7C83D871}" type="slidenum">
-              <a:rPr lang="en-US" smtClean="0"/>
+            <a:fld id="{023A53CF-6AA3-4EF6-9F05-A0E3059C583D}" type="slidenum">
+              <a:rPr lang="en-IN" smtClean="0"/>
               <a:t>‹#›</a:t>
             </a:fld>
-            <a:endParaRPr lang="en-US"/>
+            <a:endParaRPr lang="en-IN"/>
           </a:p>
         </p:txBody>
       </p:sp>
     </p:spTree>
     <p:extLst>
       <p:ext uri="{BB962C8B-B14F-4D97-AF65-F5344CB8AC3E}">
-        <p14:creationId xmlns:p14="http://schemas.microsoft.com/office/powerpoint/2010/main" val="4275079751"/>
+        <p14:creationId xmlns:p14="http://schemas.microsoft.com/office/powerpoint/2010/main" val="3282989655"/>
       </p:ext>
     </p:extLst>
   </p:cSld>
@@ -1871,7 +1726,7 @@
           <p:cNvPr id="2" name="Vertical Title 1">
             <a:extLst>
               <a:ext uri="{FF2B5EF4-FFF2-40B4-BE49-F238E27FC236}">
-                <a16:creationId xmlns:a16="http://schemas.microsoft.com/office/drawing/2014/main" id="{72293F13-2480-AB35-1A68-57A54CE6CD63}"/>
+                <a16:creationId xmlns:a16="http://schemas.microsoft.com/office/drawing/2014/main" id="{8B873E00-8852-9872-6FBC-537174553939}"/>
               </a:ext>
             </a:extLst>
           </p:cNvPr>
@@ -1896,6 +1751,7 @@
               <a:rPr lang="en-US"/>
               <a:t>Click to edit Master title style</a:t>
             </a:r>
+            <a:endParaRPr lang="en-IN"/>
           </a:p>
         </p:txBody>
       </p:sp>
@@ -1904,7 +1760,7 @@
           <p:cNvPr id="3" name="Vertical Text Placeholder 2">
             <a:extLst>
               <a:ext uri="{FF2B5EF4-FFF2-40B4-BE49-F238E27FC236}">
-                <a16:creationId xmlns:a16="http://schemas.microsoft.com/office/drawing/2014/main" id="{3BDA286C-2521-2961-CABA-5684DF43FB2A}"/>
+                <a16:creationId xmlns:a16="http://schemas.microsoft.com/office/drawing/2014/main" id="{FA02A146-0150-F26C-6A86-1CA1FD558AAE}"/>
               </a:ext>
             </a:extLst>
           </p:cNvPr>
@@ -1958,6 +1814,7 @@
               <a:rPr lang="en-US"/>
               <a:t>Fifth level</a:t>
             </a:r>
+            <a:endParaRPr lang="en-IN"/>
           </a:p>
         </p:txBody>
       </p:sp>
@@ -1966,7 +1823,7 @@
           <p:cNvPr id="4" name="Date Placeholder 3">
             <a:extLst>
               <a:ext uri="{FF2B5EF4-FFF2-40B4-BE49-F238E27FC236}">
-                <a16:creationId xmlns:a16="http://schemas.microsoft.com/office/drawing/2014/main" id="{74D5FF44-F63B-872A-DC8D-A873790A64A3}"/>
+                <a16:creationId xmlns:a16="http://schemas.microsoft.com/office/drawing/2014/main" id="{D8077DF1-F7DE-4956-6F82-6161FC02210A}"/>
               </a:ext>
             </a:extLst>
           </p:cNvPr>
@@ -1982,11 +1839,11 @@
           <a:bodyPr/>
           <a:lstStyle/>
           <a:p>
-            <a:fld id="{6383FAE1-13DE-4511-8C1B-C8AFB720664C}" type="datetimeFigureOut">
-              <a:rPr lang="en-US" smtClean="0"/>
-              <a:t>9/13/2026</a:t>
+            <a:fld id="{6EBA79C2-4FE3-4D0C-AFFB-D4FCE050D5EA}" type="datetimeFigureOut">
+              <a:rPr lang="en-IN" smtClean="0"/>
+              <a:t>02-10-2026</a:t>
             </a:fld>
-            <a:endParaRPr lang="en-US"/>
+            <a:endParaRPr lang="en-IN"/>
           </a:p>
         </p:txBody>
       </p:sp>
@@ -1995,7 +1852,7 @@
           <p:cNvPr id="5" name="Footer Placeholder 4">
             <a:extLst>
               <a:ext uri="{FF2B5EF4-FFF2-40B4-BE49-F238E27FC236}">
-                <a16:creationId xmlns:a16="http://schemas.microsoft.com/office/drawing/2014/main" id="{4E653A11-7793-38C6-0506-A6FBE9A02A10}"/>
+                <a16:creationId xmlns:a16="http://schemas.microsoft.com/office/drawing/2014/main" id="{3637416A-6960-5BA0-E825-F9D0B514C1AD}"/>
               </a:ext>
             </a:extLst>
           </p:cNvPr>
@@ -2011,7 +1868,7 @@
           <a:bodyPr/>
           <a:lstStyle/>
           <a:p>
-            <a:endParaRPr lang="en-US"/>
+            <a:endParaRPr lang="en-IN"/>
           </a:p>
         </p:txBody>
       </p:sp>
@@ -2020,7 +1877,7 @@
           <p:cNvPr id="6" name="Slide Number Placeholder 5">
             <a:extLst>
               <a:ext uri="{FF2B5EF4-FFF2-40B4-BE49-F238E27FC236}">
-                <a16:creationId xmlns:a16="http://schemas.microsoft.com/office/drawing/2014/main" id="{310962C0-F018-7629-445C-DDCA8AE1401B}"/>
+                <a16:creationId xmlns:a16="http://schemas.microsoft.com/office/drawing/2014/main" id="{E2C46A03-0511-8AD1-FB2D-69E35F8F158D}"/>
               </a:ext>
             </a:extLst>
           </p:cNvPr>
@@ -2036,18 +1893,18 @@
           <a:bodyPr/>
           <a:lstStyle/>
           <a:p>
-            <a:fld id="{81BC7A09-79EE-44A0-8F92-750D7C83D871}" type="slidenum">
-              <a:rPr lang="en-US" smtClean="0"/>
+            <a:fld id="{023A53CF-6AA3-4EF6-9F05-A0E3059C583D}" type="slidenum">
+              <a:rPr lang="en-IN" smtClean="0"/>
               <a:t>‹#›</a:t>
             </a:fld>
-            <a:endParaRPr lang="en-US"/>
+            <a:endParaRPr lang="en-IN"/>
           </a:p>
         </p:txBody>
       </p:sp>
     </p:spTree>
     <p:extLst>
       <p:ext uri="{BB962C8B-B14F-4D97-AF65-F5344CB8AC3E}">
-        <p14:creationId xmlns:p14="http://schemas.microsoft.com/office/powerpoint/2010/main" val="2612998807"/>
+        <p14:creationId xmlns:p14="http://schemas.microsoft.com/office/powerpoint/2010/main" val="3267707711"/>
       </p:ext>
     </p:extLst>
   </p:cSld>
@@ -2060,6 +1917,14 @@
 <file path=ppt/slideLayouts/slideLayout2.xml><?xml version="1.0" encoding="utf-8"?>
 <p:sldLayout xmlns:a="http://schemas.openxmlformats.org/drawingml/2006/main" xmlns:r="http://schemas.openxmlformats.org/officeDocument/2006/relationships" xmlns:p="http://schemas.openxmlformats.org/presentationml/2006/main" type="obj" preserve="1">
   <p:cSld name="Title and Content">
+    <p:bg>
+      <p:bgPr>
+        <a:solidFill>
+          <a:schemeClr val="bg1"/>
+        </a:solidFill>
+        <a:effectLst/>
+      </p:bgPr>
+    </p:bg>
     <p:spTree>
       <p:nvGrpSpPr>
         <p:cNvPr id="1" name=""/>
@@ -2079,7 +1944,7 @@
           <p:cNvPr id="2" name="Title 1">
             <a:extLst>
               <a:ext uri="{FF2B5EF4-FFF2-40B4-BE49-F238E27FC236}">
-                <a16:creationId xmlns:a16="http://schemas.microsoft.com/office/drawing/2014/main" id="{84CE7E77-8771-0BA4-B1D5-7F1DE0138C3D}"/>
+                <a16:creationId xmlns:a16="http://schemas.microsoft.com/office/drawing/2014/main" id="{D02ECE76-A752-DB86-6111-A724232D2637}"/>
               </a:ext>
             </a:extLst>
           </p:cNvPr>
@@ -2096,9 +1961,10 @@
           <a:lstStyle/>
           <a:p>
             <a:r>
-              <a:rPr lang="en-US" dirty="0"/>
+              <a:rPr lang="en-US"/>
               <a:t>Click to edit Master title style</a:t>
             </a:r>
+            <a:endParaRPr lang="en-IN"/>
           </a:p>
         </p:txBody>
       </p:sp>
@@ -2107,7 +1973,7 @@
           <p:cNvPr id="3" name="Content Placeholder 2">
             <a:extLst>
               <a:ext uri="{FF2B5EF4-FFF2-40B4-BE49-F238E27FC236}">
-                <a16:creationId xmlns:a16="http://schemas.microsoft.com/office/drawing/2014/main" id="{9543F30B-85C4-D934-2F30-179E3FCE9424}"/>
+                <a16:creationId xmlns:a16="http://schemas.microsoft.com/office/drawing/2014/main" id="{79D6FD18-B58E-8C68-26E2-D91631986249}"/>
               </a:ext>
             </a:extLst>
           </p:cNvPr>
@@ -2125,37 +1991,38 @@
           <a:p>
             <a:pPr lvl="0"/>
             <a:r>
-              <a:rPr lang="en-US" dirty="0"/>
+              <a:rPr lang="en-US"/>
               <a:t>Click to edit Master text styles</a:t>
             </a:r>
           </a:p>
           <a:p>
             <a:pPr lvl="1"/>
             <a:r>
-              <a:rPr lang="en-US" dirty="0"/>
+              <a:rPr lang="en-US"/>
               <a:t>Second level</a:t>
             </a:r>
           </a:p>
           <a:p>
             <a:pPr lvl="2"/>
             <a:r>
-              <a:rPr lang="en-US" dirty="0"/>
+              <a:rPr lang="en-US"/>
               <a:t>Third level</a:t>
             </a:r>
           </a:p>
           <a:p>
             <a:pPr lvl="3"/>
             <a:r>
-              <a:rPr lang="en-US" dirty="0"/>
+              <a:rPr lang="en-US"/>
               <a:t>Fourth level</a:t>
             </a:r>
           </a:p>
           <a:p>
             <a:pPr lvl="4"/>
             <a:r>
-              <a:rPr lang="en-US" dirty="0"/>
+              <a:rPr lang="en-US"/>
               <a:t>Fifth level</a:t>
             </a:r>
+            <a:endParaRPr lang="en-IN"/>
           </a:p>
         </p:txBody>
       </p:sp>
@@ -2164,7 +2031,7 @@
           <p:cNvPr id="4" name="Date Placeholder 3">
             <a:extLst>
               <a:ext uri="{FF2B5EF4-FFF2-40B4-BE49-F238E27FC236}">
-                <a16:creationId xmlns:a16="http://schemas.microsoft.com/office/drawing/2014/main" id="{7C8EF7AF-5CE7-4387-31F9-79D35620609B}"/>
+                <a16:creationId xmlns:a16="http://schemas.microsoft.com/office/drawing/2014/main" id="{A97B759C-A1DF-256A-A624-6AB43BC663E0}"/>
               </a:ext>
             </a:extLst>
           </p:cNvPr>
@@ -2180,11 +2047,11 @@
           <a:bodyPr/>
           <a:lstStyle/>
           <a:p>
-            <a:fld id="{6383FAE1-13DE-4511-8C1B-C8AFB720664C}" type="datetimeFigureOut">
-              <a:rPr lang="en-US" smtClean="0"/>
-              <a:t>9/13/2026</a:t>
+            <a:fld id="{6EBA79C2-4FE3-4D0C-AFFB-D4FCE050D5EA}" type="datetimeFigureOut">
+              <a:rPr lang="en-IN" smtClean="0"/>
+              <a:t>02-10-2026</a:t>
             </a:fld>
-            <a:endParaRPr lang="en-US"/>
+            <a:endParaRPr lang="en-IN"/>
           </a:p>
         </p:txBody>
       </p:sp>
@@ -2193,7 +2060,7 @@
           <p:cNvPr id="5" name="Footer Placeholder 4">
             <a:extLst>
               <a:ext uri="{FF2B5EF4-FFF2-40B4-BE49-F238E27FC236}">
-                <a16:creationId xmlns:a16="http://schemas.microsoft.com/office/drawing/2014/main" id="{B0FCCC03-E434-4684-B55E-3F2D39916923}"/>
+                <a16:creationId xmlns:a16="http://schemas.microsoft.com/office/drawing/2014/main" id="{EB71A0AA-5283-1539-E76D-C2704EDF6283}"/>
               </a:ext>
             </a:extLst>
           </p:cNvPr>
@@ -2209,7 +2076,7 @@
           <a:bodyPr/>
           <a:lstStyle/>
           <a:p>
-            <a:endParaRPr lang="en-US"/>
+            <a:endParaRPr lang="en-IN"/>
           </a:p>
         </p:txBody>
       </p:sp>
@@ -2218,7 +2085,7 @@
           <p:cNvPr id="6" name="Slide Number Placeholder 5">
             <a:extLst>
               <a:ext uri="{FF2B5EF4-FFF2-40B4-BE49-F238E27FC236}">
-                <a16:creationId xmlns:a16="http://schemas.microsoft.com/office/drawing/2014/main" id="{BA1F3B05-B983-07A3-4B58-9D2E18438894}"/>
+                <a16:creationId xmlns:a16="http://schemas.microsoft.com/office/drawing/2014/main" id="{6C212E95-A93E-CFE8-0044-F1F7486E0850}"/>
               </a:ext>
             </a:extLst>
           </p:cNvPr>
@@ -2234,23 +2101,60 @@
           <a:bodyPr/>
           <a:lstStyle/>
           <a:p>
-            <a:fld id="{81BC7A09-79EE-44A0-8F92-750D7C83D871}" type="slidenum">
-              <a:rPr lang="en-US" smtClean="0"/>
+            <a:fld id="{023A53CF-6AA3-4EF6-9F05-A0E3059C583D}" type="slidenum">
+              <a:rPr lang="en-IN" smtClean="0"/>
               <a:t>‹#›</a:t>
             </a:fld>
-            <a:endParaRPr lang="en-US"/>
-          </a:p>
-        </p:txBody>
-      </p:sp>
+            <a:endParaRPr lang="en-IN"/>
+          </a:p>
+        </p:txBody>
+      </p:sp>
+      <p:pic>
+        <p:nvPicPr>
+          <p:cNvPr id="12" name="Picture 11">
+            <a:extLst>
+              <a:ext uri="{FF2B5EF4-FFF2-40B4-BE49-F238E27FC236}">
+                <a16:creationId xmlns:a16="http://schemas.microsoft.com/office/drawing/2014/main" id="{366CBFAF-C1DF-ECA1-1863-AD86FBEE5E5B}"/>
+              </a:ext>
+            </a:extLst>
+          </p:cNvPr>
+          <p:cNvPicPr>
+            <a:picLocks noChangeAspect="1"/>
+          </p:cNvPicPr>
+          <p:nvPr userDrawn="1"/>
+        </p:nvPicPr>
+        <p:blipFill>
+          <a:blip r:embed="rId2">
+            <a:alphaModFix amt="66000"/>
+            <a:extLst>
+              <a:ext uri="{28A0092B-C50C-407E-A947-70E740481C1C}">
+                <a14:useLocalDpi xmlns:a14="http://schemas.microsoft.com/office/drawing/2010/main" val="0"/>
+              </a:ext>
+            </a:extLst>
+          </a:blip>
+          <a:stretch>
+            <a:fillRect/>
+          </a:stretch>
+        </p:blipFill>
+        <p:spPr>
+          <a:xfrm>
+            <a:off x="10870541" y="17252"/>
+            <a:ext cx="1295581" cy="924054"/>
+          </a:xfrm>
+          <a:prstGeom prst="rect">
+            <a:avLst/>
+          </a:prstGeom>
+        </p:spPr>
+      </p:pic>
     </p:spTree>
     <p:extLst>
       <p:ext uri="{BB962C8B-B14F-4D97-AF65-F5344CB8AC3E}">
-        <p14:creationId xmlns:p14="http://schemas.microsoft.com/office/powerpoint/2010/main" val="1596036442"/>
+        <p14:creationId xmlns:p14="http://schemas.microsoft.com/office/powerpoint/2010/main" val="2690746625"/>
       </p:ext>
     </p:extLst>
   </p:cSld>
   <p:clrMapOvr>
-    <a:masterClrMapping/>
+    <a:overrideClrMapping bg1="dk1" tx1="lt1" bg2="dk2" tx2="lt2" accent1="accent1" accent2="accent2" accent3="accent3" accent4="accent4" accent5="accent5" accent6="accent6" hlink="hlink" folHlink="folHlink"/>
   </p:clrMapOvr>
 </p:sldLayout>
 </file>
@@ -2277,7 +2181,7 @@
           <p:cNvPr id="2" name="Title 1">
             <a:extLst>
               <a:ext uri="{FF2B5EF4-FFF2-40B4-BE49-F238E27FC236}">
-                <a16:creationId xmlns:a16="http://schemas.microsoft.com/office/drawing/2014/main" id="{5F223C21-D6A5-2D17-9BFA-70B3353D6A08}"/>
+                <a16:creationId xmlns:a16="http://schemas.microsoft.com/office/drawing/2014/main" id="{6DA27E88-1D0E-B19B-1F3F-54DF859CE717}"/>
               </a:ext>
             </a:extLst>
           </p:cNvPr>
@@ -2306,6 +2210,7 @@
               <a:rPr lang="en-US"/>
               <a:t>Click to edit Master title style</a:t>
             </a:r>
+            <a:endParaRPr lang="en-IN"/>
           </a:p>
         </p:txBody>
       </p:sp>
@@ -2314,7 +2219,7 @@
           <p:cNvPr id="3" name="Text Placeholder 2">
             <a:extLst>
               <a:ext uri="{FF2B5EF4-FFF2-40B4-BE49-F238E27FC236}">
-                <a16:creationId xmlns:a16="http://schemas.microsoft.com/office/drawing/2014/main" id="{E92D89B8-191B-6AAD-5D5E-32B357265743}"/>
+                <a16:creationId xmlns:a16="http://schemas.microsoft.com/office/drawing/2014/main" id="{62CE41C0-D975-5322-05EF-B6920E580E10}"/>
               </a:ext>
             </a:extLst>
           </p:cNvPr>
@@ -2439,7 +2344,7 @@
           <p:cNvPr id="4" name="Date Placeholder 3">
             <a:extLst>
               <a:ext uri="{FF2B5EF4-FFF2-40B4-BE49-F238E27FC236}">
-                <a16:creationId xmlns:a16="http://schemas.microsoft.com/office/drawing/2014/main" id="{54CC528A-1563-9376-E089-4DA80AD11D0C}"/>
+                <a16:creationId xmlns:a16="http://schemas.microsoft.com/office/drawing/2014/main" id="{39D7B167-1E87-B93B-75F5-B33217202FE7}"/>
               </a:ext>
             </a:extLst>
           </p:cNvPr>
@@ -2455,11 +2360,11 @@
           <a:bodyPr/>
           <a:lstStyle/>
           <a:p>
-            <a:fld id="{6383FAE1-13DE-4511-8C1B-C8AFB720664C}" type="datetimeFigureOut">
-              <a:rPr lang="en-US" smtClean="0"/>
-              <a:t>9/13/2026</a:t>
+            <a:fld id="{6EBA79C2-4FE3-4D0C-AFFB-D4FCE050D5EA}" type="datetimeFigureOut">
+              <a:rPr lang="en-IN" smtClean="0"/>
+              <a:t>02-10-2026</a:t>
             </a:fld>
-            <a:endParaRPr lang="en-US"/>
+            <a:endParaRPr lang="en-IN"/>
           </a:p>
         </p:txBody>
       </p:sp>
@@ -2468,7 +2373,7 @@
           <p:cNvPr id="5" name="Footer Placeholder 4">
             <a:extLst>
               <a:ext uri="{FF2B5EF4-FFF2-40B4-BE49-F238E27FC236}">
-                <a16:creationId xmlns:a16="http://schemas.microsoft.com/office/drawing/2014/main" id="{0519A01D-6FDA-C269-FF95-3FDB205C8E37}"/>
+                <a16:creationId xmlns:a16="http://schemas.microsoft.com/office/drawing/2014/main" id="{6225C962-1ABF-F876-C7DD-10E729E42A8D}"/>
               </a:ext>
             </a:extLst>
           </p:cNvPr>
@@ -2484,7 +2389,7 @@
           <a:bodyPr/>
           <a:lstStyle/>
           <a:p>
-            <a:endParaRPr lang="en-US"/>
+            <a:endParaRPr lang="en-IN"/>
           </a:p>
         </p:txBody>
       </p:sp>
@@ -2493,7 +2398,7 @@
           <p:cNvPr id="6" name="Slide Number Placeholder 5">
             <a:extLst>
               <a:ext uri="{FF2B5EF4-FFF2-40B4-BE49-F238E27FC236}">
-                <a16:creationId xmlns:a16="http://schemas.microsoft.com/office/drawing/2014/main" id="{AA980A21-61AC-4B39-D886-3A327DB7346D}"/>
+                <a16:creationId xmlns:a16="http://schemas.microsoft.com/office/drawing/2014/main" id="{3A8F7B4D-DA1F-E875-52B5-31F353F49234}"/>
               </a:ext>
             </a:extLst>
           </p:cNvPr>
@@ -2509,18 +2414,18 @@
           <a:bodyPr/>
           <a:lstStyle/>
           <a:p>
-            <a:fld id="{81BC7A09-79EE-44A0-8F92-750D7C83D871}" type="slidenum">
-              <a:rPr lang="en-US" smtClean="0"/>
+            <a:fld id="{023A53CF-6AA3-4EF6-9F05-A0E3059C583D}" type="slidenum">
+              <a:rPr lang="en-IN" smtClean="0"/>
               <a:t>‹#›</a:t>
             </a:fld>
-            <a:endParaRPr lang="en-US"/>
+            <a:endParaRPr lang="en-IN"/>
           </a:p>
         </p:txBody>
       </p:sp>
     </p:spTree>
     <p:extLst>
       <p:ext uri="{BB962C8B-B14F-4D97-AF65-F5344CB8AC3E}">
-        <p14:creationId xmlns:p14="http://schemas.microsoft.com/office/powerpoint/2010/main" val="941114025"/>
+        <p14:creationId xmlns:p14="http://schemas.microsoft.com/office/powerpoint/2010/main" val="1281796100"/>
       </p:ext>
     </p:extLst>
   </p:cSld>
@@ -2552,7 +2457,7 @@
           <p:cNvPr id="2" name="Title 1">
             <a:extLst>
               <a:ext uri="{FF2B5EF4-FFF2-40B4-BE49-F238E27FC236}">
-                <a16:creationId xmlns:a16="http://schemas.microsoft.com/office/drawing/2014/main" id="{F2903C29-6DED-2A1F-5B4D-128B63652F74}"/>
+                <a16:creationId xmlns:a16="http://schemas.microsoft.com/office/drawing/2014/main" id="{04429F20-A52E-A2BE-2A7C-6344D890036E}"/>
               </a:ext>
             </a:extLst>
           </p:cNvPr>
@@ -2572,6 +2477,7 @@
               <a:rPr lang="en-US"/>
               <a:t>Click to edit Master title style</a:t>
             </a:r>
+            <a:endParaRPr lang="en-IN"/>
           </a:p>
         </p:txBody>
       </p:sp>
@@ -2580,7 +2486,7 @@
           <p:cNvPr id="3" name="Content Placeholder 2">
             <a:extLst>
               <a:ext uri="{FF2B5EF4-FFF2-40B4-BE49-F238E27FC236}">
-                <a16:creationId xmlns:a16="http://schemas.microsoft.com/office/drawing/2014/main" id="{16494ECB-0FCA-1AD0-F19A-27A4C16DC0F2}"/>
+                <a16:creationId xmlns:a16="http://schemas.microsoft.com/office/drawing/2014/main" id="{97E9F42D-CDDF-9B84-6F33-25E956F2DDE4}"/>
               </a:ext>
             </a:extLst>
           </p:cNvPr>
@@ -2634,6 +2540,7 @@
               <a:rPr lang="en-US"/>
               <a:t>Fifth level</a:t>
             </a:r>
+            <a:endParaRPr lang="en-IN"/>
           </a:p>
         </p:txBody>
       </p:sp>
@@ -2642,7 +2549,7 @@
           <p:cNvPr id="4" name="Content Placeholder 3">
             <a:extLst>
               <a:ext uri="{FF2B5EF4-FFF2-40B4-BE49-F238E27FC236}">
-                <a16:creationId xmlns:a16="http://schemas.microsoft.com/office/drawing/2014/main" id="{A07402C2-E657-5A54-9627-8C9CBCBBE0A7}"/>
+                <a16:creationId xmlns:a16="http://schemas.microsoft.com/office/drawing/2014/main" id="{761E0A4D-E831-6562-11B2-108204244C50}"/>
               </a:ext>
             </a:extLst>
           </p:cNvPr>
@@ -2696,6 +2603,7 @@
               <a:rPr lang="en-US"/>
               <a:t>Fifth level</a:t>
             </a:r>
+            <a:endParaRPr lang="en-IN"/>
           </a:p>
         </p:txBody>
       </p:sp>
@@ -2704,7 +2612,7 @@
           <p:cNvPr id="5" name="Date Placeholder 4">
             <a:extLst>
               <a:ext uri="{FF2B5EF4-FFF2-40B4-BE49-F238E27FC236}">
-                <a16:creationId xmlns:a16="http://schemas.microsoft.com/office/drawing/2014/main" id="{1501FADA-AE3E-B30F-6353-BF0478CF0E39}"/>
+                <a16:creationId xmlns:a16="http://schemas.microsoft.com/office/drawing/2014/main" id="{E85F4BEA-6EB0-7F6F-4BFA-B7DACF40DEA9}"/>
               </a:ext>
             </a:extLst>
           </p:cNvPr>
@@ -2720,11 +2628,11 @@
           <a:bodyPr/>
           <a:lstStyle/>
           <a:p>
-            <a:fld id="{6383FAE1-13DE-4511-8C1B-C8AFB720664C}" type="datetimeFigureOut">
-              <a:rPr lang="en-US" smtClean="0"/>
-              <a:t>9/13/2026</a:t>
+            <a:fld id="{6EBA79C2-4FE3-4D0C-AFFB-D4FCE050D5EA}" type="datetimeFigureOut">
+              <a:rPr lang="en-IN" smtClean="0"/>
+              <a:t>02-10-2026</a:t>
             </a:fld>
-            <a:endParaRPr lang="en-US"/>
+            <a:endParaRPr lang="en-IN"/>
           </a:p>
         </p:txBody>
       </p:sp>
@@ -2733,7 +2641,7 @@
           <p:cNvPr id="6" name="Footer Placeholder 5">
             <a:extLst>
               <a:ext uri="{FF2B5EF4-FFF2-40B4-BE49-F238E27FC236}">
-                <a16:creationId xmlns:a16="http://schemas.microsoft.com/office/drawing/2014/main" id="{7F16B517-96D7-6416-0C24-B14942ADD41C}"/>
+                <a16:creationId xmlns:a16="http://schemas.microsoft.com/office/drawing/2014/main" id="{9852B4B5-D542-513B-5FBA-7C8418FD6EE3}"/>
               </a:ext>
             </a:extLst>
           </p:cNvPr>
@@ -2749,7 +2657,7 @@
           <a:bodyPr/>
           <a:lstStyle/>
           <a:p>
-            <a:endParaRPr lang="en-US"/>
+            <a:endParaRPr lang="en-IN"/>
           </a:p>
         </p:txBody>
       </p:sp>
@@ -2758,7 +2666,7 @@
           <p:cNvPr id="7" name="Slide Number Placeholder 6">
             <a:extLst>
               <a:ext uri="{FF2B5EF4-FFF2-40B4-BE49-F238E27FC236}">
-                <a16:creationId xmlns:a16="http://schemas.microsoft.com/office/drawing/2014/main" id="{1546F179-BF2F-393A-1AA6-C893B7B9FA37}"/>
+                <a16:creationId xmlns:a16="http://schemas.microsoft.com/office/drawing/2014/main" id="{3A5B6383-F1CA-D4A5-9876-F4662B6051B7}"/>
               </a:ext>
             </a:extLst>
           </p:cNvPr>
@@ -2774,18 +2682,18 @@
           <a:bodyPr/>
           <a:lstStyle/>
           <a:p>
-            <a:fld id="{81BC7A09-79EE-44A0-8F92-750D7C83D871}" type="slidenum">
-              <a:rPr lang="en-US" smtClean="0"/>
+            <a:fld id="{023A53CF-6AA3-4EF6-9F05-A0E3059C583D}" type="slidenum">
+              <a:rPr lang="en-IN" smtClean="0"/>
               <a:t>‹#›</a:t>
             </a:fld>
-            <a:endParaRPr lang="en-US"/>
+            <a:endParaRPr lang="en-IN"/>
           </a:p>
         </p:txBody>
       </p:sp>
     </p:spTree>
     <p:extLst>
       <p:ext uri="{BB962C8B-B14F-4D97-AF65-F5344CB8AC3E}">
-        <p14:creationId xmlns:p14="http://schemas.microsoft.com/office/powerpoint/2010/main" val="3925852381"/>
+        <p14:creationId xmlns:p14="http://schemas.microsoft.com/office/powerpoint/2010/main" val="4027627197"/>
       </p:ext>
     </p:extLst>
   </p:cSld>
@@ -2817,7 +2725,7 @@
           <p:cNvPr id="2" name="Title 1">
             <a:extLst>
               <a:ext uri="{FF2B5EF4-FFF2-40B4-BE49-F238E27FC236}">
-                <a16:creationId xmlns:a16="http://schemas.microsoft.com/office/drawing/2014/main" id="{B6950483-A0C8-BF5B-61DE-39BC6FF9C123}"/>
+                <a16:creationId xmlns:a16="http://schemas.microsoft.com/office/drawing/2014/main" id="{9BCE9337-2FE3-561C-F11A-2CFAC3C88822}"/>
               </a:ext>
             </a:extLst>
           </p:cNvPr>
@@ -2842,6 +2750,7 @@
               <a:rPr lang="en-US"/>
               <a:t>Click to edit Master title style</a:t>
             </a:r>
+            <a:endParaRPr lang="en-IN"/>
           </a:p>
         </p:txBody>
       </p:sp>
@@ -2850,7 +2759,7 @@
           <p:cNvPr id="3" name="Text Placeholder 2">
             <a:extLst>
               <a:ext uri="{FF2B5EF4-FFF2-40B4-BE49-F238E27FC236}">
-                <a16:creationId xmlns:a16="http://schemas.microsoft.com/office/drawing/2014/main" id="{646DB55B-C040-F211-BC81-97628EA48448}"/>
+                <a16:creationId xmlns:a16="http://schemas.microsoft.com/office/drawing/2014/main" id="{80BCE1B6-2296-C3DE-5C27-E4057DFF68AE}"/>
               </a:ext>
             </a:extLst>
           </p:cNvPr>
@@ -2921,7 +2830,7 @@
           <p:cNvPr id="4" name="Content Placeholder 3">
             <a:extLst>
               <a:ext uri="{FF2B5EF4-FFF2-40B4-BE49-F238E27FC236}">
-                <a16:creationId xmlns:a16="http://schemas.microsoft.com/office/drawing/2014/main" id="{F593EEAE-1CB3-AAC8-5818-D61E389EF1E2}"/>
+                <a16:creationId xmlns:a16="http://schemas.microsoft.com/office/drawing/2014/main" id="{0EB2FC1E-2D6D-269A-6807-421A1A9C42DB}"/>
               </a:ext>
             </a:extLst>
           </p:cNvPr>
@@ -2975,6 +2884,7 @@
               <a:rPr lang="en-US"/>
               <a:t>Fifth level</a:t>
             </a:r>
+            <a:endParaRPr lang="en-IN"/>
           </a:p>
         </p:txBody>
       </p:sp>
@@ -2983,7 +2893,7 @@
           <p:cNvPr id="5" name="Text Placeholder 4">
             <a:extLst>
               <a:ext uri="{FF2B5EF4-FFF2-40B4-BE49-F238E27FC236}">
-                <a16:creationId xmlns:a16="http://schemas.microsoft.com/office/drawing/2014/main" id="{5ACE50F0-1141-D645-3892-2DA29633A371}"/>
+                <a16:creationId xmlns:a16="http://schemas.microsoft.com/office/drawing/2014/main" id="{281AD048-C515-130C-8F41-1BA8F4189292}"/>
               </a:ext>
             </a:extLst>
           </p:cNvPr>
@@ -3054,7 +2964,7 @@
           <p:cNvPr id="6" name="Content Placeholder 5">
             <a:extLst>
               <a:ext uri="{FF2B5EF4-FFF2-40B4-BE49-F238E27FC236}">
-                <a16:creationId xmlns:a16="http://schemas.microsoft.com/office/drawing/2014/main" id="{532E976C-52C7-C22D-28F7-B21E295185E1}"/>
+                <a16:creationId xmlns:a16="http://schemas.microsoft.com/office/drawing/2014/main" id="{3C6D4A7E-CE1F-A02A-B92A-059B1FBCF351}"/>
               </a:ext>
             </a:extLst>
           </p:cNvPr>
@@ -3108,6 +3018,7 @@
               <a:rPr lang="en-US"/>
               <a:t>Fifth level</a:t>
             </a:r>
+            <a:endParaRPr lang="en-IN"/>
           </a:p>
         </p:txBody>
       </p:sp>
@@ -3116,7 +3027,7 @@
           <p:cNvPr id="7" name="Date Placeholder 6">
             <a:extLst>
               <a:ext uri="{FF2B5EF4-FFF2-40B4-BE49-F238E27FC236}">
-                <a16:creationId xmlns:a16="http://schemas.microsoft.com/office/drawing/2014/main" id="{E797D00B-0B76-5C50-686B-A01396FCD6FA}"/>
+                <a16:creationId xmlns:a16="http://schemas.microsoft.com/office/drawing/2014/main" id="{66F77709-049A-79A2-F207-FBDA0CAA4E0A}"/>
               </a:ext>
             </a:extLst>
           </p:cNvPr>
@@ -3132,11 +3043,11 @@
           <a:bodyPr/>
           <a:lstStyle/>
           <a:p>
-            <a:fld id="{6383FAE1-13DE-4511-8C1B-C8AFB720664C}" type="datetimeFigureOut">
-              <a:rPr lang="en-US" smtClean="0"/>
-              <a:t>9/13/2026</a:t>
+            <a:fld id="{6EBA79C2-4FE3-4D0C-AFFB-D4FCE050D5EA}" type="datetimeFigureOut">
+              <a:rPr lang="en-IN" smtClean="0"/>
+              <a:t>02-10-2026</a:t>
             </a:fld>
-            <a:endParaRPr lang="en-US"/>
+            <a:endParaRPr lang="en-IN"/>
           </a:p>
         </p:txBody>
       </p:sp>
@@ -3145,7 +3056,7 @@
           <p:cNvPr id="8" name="Footer Placeholder 7">
             <a:extLst>
               <a:ext uri="{FF2B5EF4-FFF2-40B4-BE49-F238E27FC236}">
-                <a16:creationId xmlns:a16="http://schemas.microsoft.com/office/drawing/2014/main" id="{7B842B8D-3B74-4B67-9462-6D2C7ED9ADCB}"/>
+                <a16:creationId xmlns:a16="http://schemas.microsoft.com/office/drawing/2014/main" id="{59DE0EB3-83C0-67E2-5DB9-42DE8540F862}"/>
               </a:ext>
             </a:extLst>
           </p:cNvPr>
@@ -3161,7 +3072,7 @@
           <a:bodyPr/>
           <a:lstStyle/>
           <a:p>
-            <a:endParaRPr lang="en-US"/>
+            <a:endParaRPr lang="en-IN"/>
           </a:p>
         </p:txBody>
       </p:sp>
@@ -3170,7 +3081,7 @@
           <p:cNvPr id="9" name="Slide Number Placeholder 8">
             <a:extLst>
               <a:ext uri="{FF2B5EF4-FFF2-40B4-BE49-F238E27FC236}">
-                <a16:creationId xmlns:a16="http://schemas.microsoft.com/office/drawing/2014/main" id="{F992D4BE-CE8C-0250-FE7D-1F370E25FE27}"/>
+                <a16:creationId xmlns:a16="http://schemas.microsoft.com/office/drawing/2014/main" id="{20C97AB3-472A-1E13-8460-CE1D861DB6C2}"/>
               </a:ext>
             </a:extLst>
           </p:cNvPr>
@@ -3186,18 +3097,18 @@
           <a:bodyPr/>
           <a:lstStyle/>
           <a:p>
-            <a:fld id="{81BC7A09-79EE-44A0-8F92-750D7C83D871}" type="slidenum">
-              <a:rPr lang="en-US" smtClean="0"/>
+            <a:fld id="{023A53CF-6AA3-4EF6-9F05-A0E3059C583D}" type="slidenum">
+              <a:rPr lang="en-IN" smtClean="0"/>
               <a:t>‹#›</a:t>
             </a:fld>
-            <a:endParaRPr lang="en-US"/>
+            <a:endParaRPr lang="en-IN"/>
           </a:p>
         </p:txBody>
       </p:sp>
     </p:spTree>
     <p:extLst>
       <p:ext uri="{BB962C8B-B14F-4D97-AF65-F5344CB8AC3E}">
-        <p14:creationId xmlns:p14="http://schemas.microsoft.com/office/powerpoint/2010/main" val="3765750289"/>
+        <p14:creationId xmlns:p14="http://schemas.microsoft.com/office/powerpoint/2010/main" val="4043864109"/>
       </p:ext>
     </p:extLst>
   </p:cSld>
@@ -3229,7 +3140,7 @@
           <p:cNvPr id="2" name="Title 1">
             <a:extLst>
               <a:ext uri="{FF2B5EF4-FFF2-40B4-BE49-F238E27FC236}">
-                <a16:creationId xmlns:a16="http://schemas.microsoft.com/office/drawing/2014/main" id="{CBCDBE28-2732-66A2-163C-433854615E7C}"/>
+                <a16:creationId xmlns:a16="http://schemas.microsoft.com/office/drawing/2014/main" id="{251C5904-8D4D-4CA9-51B3-289632997B0B}"/>
               </a:ext>
             </a:extLst>
           </p:cNvPr>
@@ -3249,6 +3160,7 @@
               <a:rPr lang="en-US"/>
               <a:t>Click to edit Master title style</a:t>
             </a:r>
+            <a:endParaRPr lang="en-IN"/>
           </a:p>
         </p:txBody>
       </p:sp>
@@ -3257,7 +3169,7 @@
           <p:cNvPr id="3" name="Date Placeholder 2">
             <a:extLst>
               <a:ext uri="{FF2B5EF4-FFF2-40B4-BE49-F238E27FC236}">
-                <a16:creationId xmlns:a16="http://schemas.microsoft.com/office/drawing/2014/main" id="{E270F3D6-B4BC-015F-96FA-1720B040CC96}"/>
+                <a16:creationId xmlns:a16="http://schemas.microsoft.com/office/drawing/2014/main" id="{EE398302-AD6F-2CE6-7442-A4A9683D9718}"/>
               </a:ext>
             </a:extLst>
           </p:cNvPr>
@@ -3273,11 +3185,11 @@
           <a:bodyPr/>
           <a:lstStyle/>
           <a:p>
-            <a:fld id="{6383FAE1-13DE-4511-8C1B-C8AFB720664C}" type="datetimeFigureOut">
-              <a:rPr lang="en-US" smtClean="0"/>
-              <a:t>9/13/2026</a:t>
+            <a:fld id="{6EBA79C2-4FE3-4D0C-AFFB-D4FCE050D5EA}" type="datetimeFigureOut">
+              <a:rPr lang="en-IN" smtClean="0"/>
+              <a:t>02-10-2026</a:t>
             </a:fld>
-            <a:endParaRPr lang="en-US"/>
+            <a:endParaRPr lang="en-IN"/>
           </a:p>
         </p:txBody>
       </p:sp>
@@ -3286,7 +3198,7 @@
           <p:cNvPr id="4" name="Footer Placeholder 3">
             <a:extLst>
               <a:ext uri="{FF2B5EF4-FFF2-40B4-BE49-F238E27FC236}">
-                <a16:creationId xmlns:a16="http://schemas.microsoft.com/office/drawing/2014/main" id="{21168A87-13A5-0A5A-4D74-C75E27775575}"/>
+                <a16:creationId xmlns:a16="http://schemas.microsoft.com/office/drawing/2014/main" id="{15391825-01DE-3CBB-BB33-763481B92D74}"/>
               </a:ext>
             </a:extLst>
           </p:cNvPr>
@@ -3302,7 +3214,7 @@
           <a:bodyPr/>
           <a:lstStyle/>
           <a:p>
-            <a:endParaRPr lang="en-US"/>
+            <a:endParaRPr lang="en-IN"/>
           </a:p>
         </p:txBody>
       </p:sp>
@@ -3311,7 +3223,7 @@
           <p:cNvPr id="5" name="Slide Number Placeholder 4">
             <a:extLst>
               <a:ext uri="{FF2B5EF4-FFF2-40B4-BE49-F238E27FC236}">
-                <a16:creationId xmlns:a16="http://schemas.microsoft.com/office/drawing/2014/main" id="{ADD6D7CB-BD93-54BE-CB47-7FBA06B18442}"/>
+                <a16:creationId xmlns:a16="http://schemas.microsoft.com/office/drawing/2014/main" id="{07D5401A-71EA-0313-9EA1-4DC2DB3F758C}"/>
               </a:ext>
             </a:extLst>
           </p:cNvPr>
@@ -3327,18 +3239,18 @@
           <a:bodyPr/>
           <a:lstStyle/>
           <a:p>
-            <a:fld id="{81BC7A09-79EE-44A0-8F92-750D7C83D871}" type="slidenum">
-              <a:rPr lang="en-US" smtClean="0"/>
+            <a:fld id="{023A53CF-6AA3-4EF6-9F05-A0E3059C583D}" type="slidenum">
+              <a:rPr lang="en-IN" smtClean="0"/>
               <a:t>‹#›</a:t>
             </a:fld>
-            <a:endParaRPr lang="en-US"/>
+            <a:endParaRPr lang="en-IN"/>
           </a:p>
         </p:txBody>
       </p:sp>
     </p:spTree>
     <p:extLst>
       <p:ext uri="{BB962C8B-B14F-4D97-AF65-F5344CB8AC3E}">
-        <p14:creationId xmlns:p14="http://schemas.microsoft.com/office/powerpoint/2010/main" val="734650834"/>
+        <p14:creationId xmlns:p14="http://schemas.microsoft.com/office/powerpoint/2010/main" val="3389444527"/>
       </p:ext>
     </p:extLst>
   </p:cSld>
@@ -3370,7 +3282,7 @@
           <p:cNvPr id="2" name="Date Placeholder 1">
             <a:extLst>
               <a:ext uri="{FF2B5EF4-FFF2-40B4-BE49-F238E27FC236}">
-                <a16:creationId xmlns:a16="http://schemas.microsoft.com/office/drawing/2014/main" id="{49B4114B-4550-9F52-0EF5-D1E9CF2FD384}"/>
+                <a16:creationId xmlns:a16="http://schemas.microsoft.com/office/drawing/2014/main" id="{E2418529-294A-5688-70AC-D6FBB2669691}"/>
               </a:ext>
             </a:extLst>
           </p:cNvPr>
@@ -3386,11 +3298,11 @@
           <a:bodyPr/>
           <a:lstStyle/>
           <a:p>
-            <a:fld id="{6383FAE1-13DE-4511-8C1B-C8AFB720664C}" type="datetimeFigureOut">
-              <a:rPr lang="en-US" smtClean="0"/>
-              <a:t>9/13/2026</a:t>
+            <a:fld id="{6EBA79C2-4FE3-4D0C-AFFB-D4FCE050D5EA}" type="datetimeFigureOut">
+              <a:rPr lang="en-IN" smtClean="0"/>
+              <a:t>02-10-2026</a:t>
             </a:fld>
-            <a:endParaRPr lang="en-US"/>
+            <a:endParaRPr lang="en-IN"/>
           </a:p>
         </p:txBody>
       </p:sp>
@@ -3399,7 +3311,7 @@
           <p:cNvPr id="3" name="Footer Placeholder 2">
             <a:extLst>
               <a:ext uri="{FF2B5EF4-FFF2-40B4-BE49-F238E27FC236}">
-                <a16:creationId xmlns:a16="http://schemas.microsoft.com/office/drawing/2014/main" id="{0BF3136E-0C79-F4F5-F24E-D5FF71CDB55C}"/>
+                <a16:creationId xmlns:a16="http://schemas.microsoft.com/office/drawing/2014/main" id="{774AA024-38B7-5F32-1894-BCE21AADFC16}"/>
               </a:ext>
             </a:extLst>
           </p:cNvPr>
@@ -3415,7 +3327,7 @@
           <a:bodyPr/>
           <a:lstStyle/>
           <a:p>
-            <a:endParaRPr lang="en-US"/>
+            <a:endParaRPr lang="en-IN"/>
           </a:p>
         </p:txBody>
       </p:sp>
@@ -3424,7 +3336,7 @@
           <p:cNvPr id="4" name="Slide Number Placeholder 3">
             <a:extLst>
               <a:ext uri="{FF2B5EF4-FFF2-40B4-BE49-F238E27FC236}">
-                <a16:creationId xmlns:a16="http://schemas.microsoft.com/office/drawing/2014/main" id="{9F2E2157-F670-A339-0CB7-7399568D5A1C}"/>
+                <a16:creationId xmlns:a16="http://schemas.microsoft.com/office/drawing/2014/main" id="{436C172C-4B71-8ABE-DD86-85DD12827B5A}"/>
               </a:ext>
             </a:extLst>
           </p:cNvPr>
@@ -3440,18 +3352,18 @@
           <a:bodyPr/>
           <a:lstStyle/>
           <a:p>
-            <a:fld id="{81BC7A09-79EE-44A0-8F92-750D7C83D871}" type="slidenum">
-              <a:rPr lang="en-US" smtClean="0"/>
+            <a:fld id="{023A53CF-6AA3-4EF6-9F05-A0E3059C583D}" type="slidenum">
+              <a:rPr lang="en-IN" smtClean="0"/>
               <a:t>‹#›</a:t>
             </a:fld>
-            <a:endParaRPr lang="en-US"/>
+            <a:endParaRPr lang="en-IN"/>
           </a:p>
         </p:txBody>
       </p:sp>
     </p:spTree>
     <p:extLst>
       <p:ext uri="{BB962C8B-B14F-4D97-AF65-F5344CB8AC3E}">
-        <p14:creationId xmlns:p14="http://schemas.microsoft.com/office/powerpoint/2010/main" val="3796501475"/>
+        <p14:creationId xmlns:p14="http://schemas.microsoft.com/office/powerpoint/2010/main" val="2826162352"/>
       </p:ext>
     </p:extLst>
   </p:cSld>
@@ -3483,7 +3395,7 @@
           <p:cNvPr id="2" name="Title 1">
             <a:extLst>
               <a:ext uri="{FF2B5EF4-FFF2-40B4-BE49-F238E27FC236}">
-                <a16:creationId xmlns:a16="http://schemas.microsoft.com/office/drawing/2014/main" id="{A5802A98-8738-1E16-A16E-D8858EEA762D}"/>
+                <a16:creationId xmlns:a16="http://schemas.microsoft.com/office/drawing/2014/main" id="{97BEB6CF-2A94-DBDD-0D5B-BC12FF3220C5}"/>
               </a:ext>
             </a:extLst>
           </p:cNvPr>
@@ -3512,6 +3424,7 @@
               <a:rPr lang="en-US"/>
               <a:t>Click to edit Master title style</a:t>
             </a:r>
+            <a:endParaRPr lang="en-IN"/>
           </a:p>
         </p:txBody>
       </p:sp>
@@ -3520,7 +3433,7 @@
           <p:cNvPr id="3" name="Content Placeholder 2">
             <a:extLst>
               <a:ext uri="{FF2B5EF4-FFF2-40B4-BE49-F238E27FC236}">
-                <a16:creationId xmlns:a16="http://schemas.microsoft.com/office/drawing/2014/main" id="{64FC67E5-1169-257D-D9E7-C7B952C21372}"/>
+                <a16:creationId xmlns:a16="http://schemas.microsoft.com/office/drawing/2014/main" id="{EF4B7D8E-A4B1-A435-346C-19A718C71F13}"/>
               </a:ext>
             </a:extLst>
           </p:cNvPr>
@@ -3602,6 +3515,7 @@
               <a:rPr lang="en-US"/>
               <a:t>Fifth level</a:t>
             </a:r>
+            <a:endParaRPr lang="en-IN"/>
           </a:p>
         </p:txBody>
       </p:sp>
@@ -3610,7 +3524,7 @@
           <p:cNvPr id="4" name="Text Placeholder 3">
             <a:extLst>
               <a:ext uri="{FF2B5EF4-FFF2-40B4-BE49-F238E27FC236}">
-                <a16:creationId xmlns:a16="http://schemas.microsoft.com/office/drawing/2014/main" id="{90B2CF6C-0F85-566A-86BC-CBFEB17E755D}"/>
+                <a16:creationId xmlns:a16="http://schemas.microsoft.com/office/drawing/2014/main" id="{A57C91E7-453A-3F92-E638-C337924651AF}"/>
               </a:ext>
             </a:extLst>
           </p:cNvPr>
@@ -3681,7 +3595,7 @@
           <p:cNvPr id="5" name="Date Placeholder 4">
             <a:extLst>
               <a:ext uri="{FF2B5EF4-FFF2-40B4-BE49-F238E27FC236}">
-                <a16:creationId xmlns:a16="http://schemas.microsoft.com/office/drawing/2014/main" id="{1A64F0FC-ECB8-638F-A224-98FFA8270730}"/>
+                <a16:creationId xmlns:a16="http://schemas.microsoft.com/office/drawing/2014/main" id="{7C7C4555-70D3-F8F8-D355-E9BBC9EE67F8}"/>
               </a:ext>
             </a:extLst>
           </p:cNvPr>
@@ -3697,11 +3611,11 @@
           <a:bodyPr/>
           <a:lstStyle/>
           <a:p>
-            <a:fld id="{6383FAE1-13DE-4511-8C1B-C8AFB720664C}" type="datetimeFigureOut">
-              <a:rPr lang="en-US" smtClean="0"/>
-              <a:t>9/13/2026</a:t>
+            <a:fld id="{6EBA79C2-4FE3-4D0C-AFFB-D4FCE050D5EA}" type="datetimeFigureOut">
+              <a:rPr lang="en-IN" smtClean="0"/>
+              <a:t>02-10-2026</a:t>
             </a:fld>
-            <a:endParaRPr lang="en-US"/>
+            <a:endParaRPr lang="en-IN"/>
           </a:p>
         </p:txBody>
       </p:sp>
@@ -3710,7 +3624,7 @@
           <p:cNvPr id="6" name="Footer Placeholder 5">
             <a:extLst>
               <a:ext uri="{FF2B5EF4-FFF2-40B4-BE49-F238E27FC236}">
-                <a16:creationId xmlns:a16="http://schemas.microsoft.com/office/drawing/2014/main" id="{A8095B89-4DC8-435E-3545-6187AD3E00A8}"/>
+                <a16:creationId xmlns:a16="http://schemas.microsoft.com/office/drawing/2014/main" id="{55FE752C-45A1-07D0-4240-44893A0DB930}"/>
               </a:ext>
             </a:extLst>
           </p:cNvPr>
@@ -3726,7 +3640,7 @@
           <a:bodyPr/>
           <a:lstStyle/>
           <a:p>
-            <a:endParaRPr lang="en-US"/>
+            <a:endParaRPr lang="en-IN"/>
           </a:p>
         </p:txBody>
       </p:sp>
@@ -3735,7 +3649,7 @@
           <p:cNvPr id="7" name="Slide Number Placeholder 6">
             <a:extLst>
               <a:ext uri="{FF2B5EF4-FFF2-40B4-BE49-F238E27FC236}">
-                <a16:creationId xmlns:a16="http://schemas.microsoft.com/office/drawing/2014/main" id="{171B68CF-9592-FB7C-B517-0CC962C8B6DC}"/>
+                <a16:creationId xmlns:a16="http://schemas.microsoft.com/office/drawing/2014/main" id="{39DDD99C-C480-C729-0ECD-BEDE124E840E}"/>
               </a:ext>
             </a:extLst>
           </p:cNvPr>
@@ -3751,18 +3665,18 @@
           <a:bodyPr/>
           <a:lstStyle/>
           <a:p>
-            <a:fld id="{81BC7A09-79EE-44A0-8F92-750D7C83D871}" type="slidenum">
-              <a:rPr lang="en-US" smtClean="0"/>
+            <a:fld id="{023A53CF-6AA3-4EF6-9F05-A0E3059C583D}" type="slidenum">
+              <a:rPr lang="en-IN" smtClean="0"/>
               <a:t>‹#›</a:t>
             </a:fld>
-            <a:endParaRPr lang="en-US"/>
+            <a:endParaRPr lang="en-IN"/>
           </a:p>
         </p:txBody>
       </p:sp>
     </p:spTree>
     <p:extLst>
       <p:ext uri="{BB962C8B-B14F-4D97-AF65-F5344CB8AC3E}">
-        <p14:creationId xmlns:p14="http://schemas.microsoft.com/office/powerpoint/2010/main" val="2644300723"/>
+        <p14:creationId xmlns:p14="http://schemas.microsoft.com/office/powerpoint/2010/main" val="780093886"/>
       </p:ext>
     </p:extLst>
   </p:cSld>
@@ -3794,7 +3708,7 @@
           <p:cNvPr id="2" name="Title 1">
             <a:extLst>
               <a:ext uri="{FF2B5EF4-FFF2-40B4-BE49-F238E27FC236}">
-                <a16:creationId xmlns:a16="http://schemas.microsoft.com/office/drawing/2014/main" id="{853E2BC2-F728-2BA5-C848-31FA3458ADF0}"/>
+                <a16:creationId xmlns:a16="http://schemas.microsoft.com/office/drawing/2014/main" id="{7FD2D6FA-24BB-7D09-4CC6-34096CAB0EC2}"/>
               </a:ext>
             </a:extLst>
           </p:cNvPr>
@@ -3823,6 +3737,7 @@
               <a:rPr lang="en-US"/>
               <a:t>Click to edit Master title style</a:t>
             </a:r>
+            <a:endParaRPr lang="en-IN"/>
           </a:p>
         </p:txBody>
       </p:sp>
@@ -3831,12 +3746,12 @@
           <p:cNvPr id="3" name="Picture Placeholder 2">
             <a:extLst>
               <a:ext uri="{FF2B5EF4-FFF2-40B4-BE49-F238E27FC236}">
-                <a16:creationId xmlns:a16="http://schemas.microsoft.com/office/drawing/2014/main" id="{B957B909-12C3-703B-57E9-008076312F68}"/>
+                <a16:creationId xmlns:a16="http://schemas.microsoft.com/office/drawing/2014/main" id="{6C60CEAA-CE7A-1BBF-BDA9-B387E6B8B163}"/>
               </a:ext>
             </a:extLst>
           </p:cNvPr>
           <p:cNvSpPr>
-            <a:spLocks noGrp="1"/>
+            <a:spLocks noGrp="1" noChangeAspect="1"/>
           </p:cNvSpPr>
           <p:nvPr>
             <p:ph type="pic" idx="1"/>
@@ -3889,10 +3804,7 @@
             </a:lvl9pPr>
           </a:lstStyle>
           <a:p>
-            <a:r>
-              <a:rPr lang="en-US"/>
-              <a:t>Click icon to add picture</a:t>
-            </a:r>
+            <a:endParaRPr lang="en-IN"/>
           </a:p>
         </p:txBody>
       </p:sp>
@@ -3901,7 +3813,7 @@
           <p:cNvPr id="4" name="Text Placeholder 3">
             <a:extLst>
               <a:ext uri="{FF2B5EF4-FFF2-40B4-BE49-F238E27FC236}">
-                <a16:creationId xmlns:a16="http://schemas.microsoft.com/office/drawing/2014/main" id="{FDAE4D7A-BC41-33D0-D36D-08BB5C2C594A}"/>
+                <a16:creationId xmlns:a16="http://schemas.microsoft.com/office/drawing/2014/main" id="{1019DD54-A44F-A8AE-D4E9-3EB63270CC1C}"/>
               </a:ext>
             </a:extLst>
           </p:cNvPr>
@@ -3972,7 +3884,7 @@
           <p:cNvPr id="5" name="Date Placeholder 4">
             <a:extLst>
               <a:ext uri="{FF2B5EF4-FFF2-40B4-BE49-F238E27FC236}">
-                <a16:creationId xmlns:a16="http://schemas.microsoft.com/office/drawing/2014/main" id="{FB17FB83-437D-9293-0B99-2DC89A047DD5}"/>
+                <a16:creationId xmlns:a16="http://schemas.microsoft.com/office/drawing/2014/main" id="{6206B6FD-902D-C3AC-D0C4-9E348A977E8B}"/>
               </a:ext>
             </a:extLst>
           </p:cNvPr>
@@ -3988,11 +3900,11 @@
           <a:bodyPr/>
           <a:lstStyle/>
           <a:p>
-            <a:fld id="{6383FAE1-13DE-4511-8C1B-C8AFB720664C}" type="datetimeFigureOut">
-              <a:rPr lang="en-US" smtClean="0"/>
-              <a:t>9/13/2026</a:t>
+            <a:fld id="{6EBA79C2-4FE3-4D0C-AFFB-D4FCE050D5EA}" type="datetimeFigureOut">
+              <a:rPr lang="en-IN" smtClean="0"/>
+              <a:t>02-10-2026</a:t>
             </a:fld>
-            <a:endParaRPr lang="en-US"/>
+            <a:endParaRPr lang="en-IN"/>
           </a:p>
         </p:txBody>
       </p:sp>
@@ -4001,7 +3913,7 @@
           <p:cNvPr id="6" name="Footer Placeholder 5">
             <a:extLst>
               <a:ext uri="{FF2B5EF4-FFF2-40B4-BE49-F238E27FC236}">
-                <a16:creationId xmlns:a16="http://schemas.microsoft.com/office/drawing/2014/main" id="{1EDF5674-4DC1-3171-8FEB-C280686D413B}"/>
+                <a16:creationId xmlns:a16="http://schemas.microsoft.com/office/drawing/2014/main" id="{A0D6BDC1-316A-149B-EB15-04EF4D60E72C}"/>
               </a:ext>
             </a:extLst>
           </p:cNvPr>
@@ -4017,7 +3929,7 @@
           <a:bodyPr/>
           <a:lstStyle/>
           <a:p>
-            <a:endParaRPr lang="en-US"/>
+            <a:endParaRPr lang="en-IN"/>
           </a:p>
         </p:txBody>
       </p:sp>
@@ -4026,7 +3938,7 @@
           <p:cNvPr id="7" name="Slide Number Placeholder 6">
             <a:extLst>
               <a:ext uri="{FF2B5EF4-FFF2-40B4-BE49-F238E27FC236}">
-                <a16:creationId xmlns:a16="http://schemas.microsoft.com/office/drawing/2014/main" id="{FDD431F6-5490-78BA-7028-0BD08BF1A0FA}"/>
+                <a16:creationId xmlns:a16="http://schemas.microsoft.com/office/drawing/2014/main" id="{D7C24CD2-3C56-F4F2-57FB-AA714E5021A0}"/>
               </a:ext>
             </a:extLst>
           </p:cNvPr>
@@ -4042,18 +3954,18 @@
           <a:bodyPr/>
           <a:lstStyle/>
           <a:p>
-            <a:fld id="{81BC7A09-79EE-44A0-8F92-750D7C83D871}" type="slidenum">
-              <a:rPr lang="en-US" smtClean="0"/>
+            <a:fld id="{023A53CF-6AA3-4EF6-9F05-A0E3059C583D}" type="slidenum">
+              <a:rPr lang="en-IN" smtClean="0"/>
               <a:t>‹#›</a:t>
             </a:fld>
-            <a:endParaRPr lang="en-US"/>
+            <a:endParaRPr lang="en-IN"/>
           </a:p>
         </p:txBody>
       </p:sp>
     </p:spTree>
     <p:extLst>
       <p:ext uri="{BB962C8B-B14F-4D97-AF65-F5344CB8AC3E}">
-        <p14:creationId xmlns:p14="http://schemas.microsoft.com/office/powerpoint/2010/main" val="2380860319"/>
+        <p14:creationId xmlns:p14="http://schemas.microsoft.com/office/powerpoint/2010/main" val="50273816"/>
       </p:ext>
     </p:extLst>
   </p:cSld>
@@ -4093,7 +4005,7 @@
           <p:cNvPr id="2" name="Title Placeholder 1">
             <a:extLst>
               <a:ext uri="{FF2B5EF4-FFF2-40B4-BE49-F238E27FC236}">
-                <a16:creationId xmlns:a16="http://schemas.microsoft.com/office/drawing/2014/main" id="{73CEE1C2-DF65-6CAD-D1EF-224508404395}"/>
+                <a16:creationId xmlns:a16="http://schemas.microsoft.com/office/drawing/2014/main" id="{8C5CC290-6B0D-273C-46F1-4BC1249347F8}"/>
               </a:ext>
             </a:extLst>
           </p:cNvPr>
@@ -4120,9 +4032,10 @@
           <a:lstStyle/>
           <a:p>
             <a:r>
-              <a:rPr lang="en-US" dirty="0"/>
+              <a:rPr lang="en-US"/>
               <a:t>Click to edit Master title style</a:t>
             </a:r>
+            <a:endParaRPr lang="en-IN"/>
           </a:p>
         </p:txBody>
       </p:sp>
@@ -4131,7 +4044,7 @@
           <p:cNvPr id="3" name="Text Placeholder 2">
             <a:extLst>
               <a:ext uri="{FF2B5EF4-FFF2-40B4-BE49-F238E27FC236}">
-                <a16:creationId xmlns:a16="http://schemas.microsoft.com/office/drawing/2014/main" id="{46AFB6A6-8766-C849-1846-0F387502412C}"/>
+                <a16:creationId xmlns:a16="http://schemas.microsoft.com/office/drawing/2014/main" id="{14E82B2E-EDC9-AB14-8964-7BE30F8DB18F}"/>
               </a:ext>
             </a:extLst>
           </p:cNvPr>
@@ -4159,37 +4072,38 @@
           <a:p>
             <a:pPr lvl="0"/>
             <a:r>
-              <a:rPr lang="en-US" dirty="0"/>
+              <a:rPr lang="en-US"/>
               <a:t>Click to edit Master text styles</a:t>
             </a:r>
           </a:p>
           <a:p>
             <a:pPr lvl="1"/>
             <a:r>
-              <a:rPr lang="en-US" dirty="0"/>
+              <a:rPr lang="en-US"/>
               <a:t>Second level</a:t>
             </a:r>
           </a:p>
           <a:p>
             <a:pPr lvl="2"/>
             <a:r>
-              <a:rPr lang="en-US" dirty="0"/>
+              <a:rPr lang="en-US"/>
               <a:t>Third level</a:t>
             </a:r>
           </a:p>
           <a:p>
             <a:pPr lvl="3"/>
             <a:r>
-              <a:rPr lang="en-US" dirty="0"/>
+              <a:rPr lang="en-US"/>
               <a:t>Fourth level</a:t>
             </a:r>
           </a:p>
           <a:p>
             <a:pPr lvl="4"/>
             <a:r>
-              <a:rPr lang="en-US" dirty="0"/>
+              <a:rPr lang="en-US"/>
               <a:t>Fifth level</a:t>
             </a:r>
+            <a:endParaRPr lang="en-IN"/>
           </a:p>
         </p:txBody>
       </p:sp>
@@ -4198,7 +4112,7 @@
           <p:cNvPr id="4" name="Date Placeholder 3">
             <a:extLst>
               <a:ext uri="{FF2B5EF4-FFF2-40B4-BE49-F238E27FC236}">
-                <a16:creationId xmlns:a16="http://schemas.microsoft.com/office/drawing/2014/main" id="{CB55176B-E136-1615-D0B5-186783ACB8FF}"/>
+                <a16:creationId xmlns:a16="http://schemas.microsoft.com/office/drawing/2014/main" id="{42485163-E247-487C-9AA7-8A7054D4ACE1}"/>
               </a:ext>
             </a:extLst>
           </p:cNvPr>
@@ -4232,11 +4146,11 @@
             </a:lvl1pPr>
           </a:lstStyle>
           <a:p>
-            <a:fld id="{6383FAE1-13DE-4511-8C1B-C8AFB720664C}" type="datetimeFigureOut">
-              <a:rPr lang="en-US" smtClean="0"/>
-              <a:t>9/13/2026</a:t>
+            <a:fld id="{6EBA79C2-4FE3-4D0C-AFFB-D4FCE050D5EA}" type="datetimeFigureOut">
+              <a:rPr lang="en-IN" smtClean="0"/>
+              <a:t>02-10-2026</a:t>
             </a:fld>
-            <a:endParaRPr lang="en-US"/>
+            <a:endParaRPr lang="en-IN"/>
           </a:p>
         </p:txBody>
       </p:sp>
@@ -4245,7 +4159,7 @@
           <p:cNvPr id="5" name="Footer Placeholder 4">
             <a:extLst>
               <a:ext uri="{FF2B5EF4-FFF2-40B4-BE49-F238E27FC236}">
-                <a16:creationId xmlns:a16="http://schemas.microsoft.com/office/drawing/2014/main" id="{5E5AAAF6-4731-DB91-AB26-A07CEF1B9D24}"/>
+                <a16:creationId xmlns:a16="http://schemas.microsoft.com/office/drawing/2014/main" id="{85A01BDB-2D7B-79FC-D492-3CFF792A8A38}"/>
               </a:ext>
             </a:extLst>
           </p:cNvPr>
@@ -4279,7 +4193,7 @@
             </a:lvl1pPr>
           </a:lstStyle>
           <a:p>
-            <a:endParaRPr lang="en-US"/>
+            <a:endParaRPr lang="en-IN"/>
           </a:p>
         </p:txBody>
       </p:sp>
@@ -4288,7 +4202,7 @@
           <p:cNvPr id="6" name="Slide Number Placeholder 5">
             <a:extLst>
               <a:ext uri="{FF2B5EF4-FFF2-40B4-BE49-F238E27FC236}">
-                <a16:creationId xmlns:a16="http://schemas.microsoft.com/office/drawing/2014/main" id="{9814165E-BEE7-F086-BE90-50642610F091}"/>
+                <a16:creationId xmlns:a16="http://schemas.microsoft.com/office/drawing/2014/main" id="{BEC906FC-E273-8A6D-0868-0A52746784A4}"/>
               </a:ext>
             </a:extLst>
           </p:cNvPr>
@@ -4322,11 +4236,11 @@
             </a:lvl1pPr>
           </a:lstStyle>
           <a:p>
-            <a:fld id="{81BC7A09-79EE-44A0-8F92-750D7C83D871}" type="slidenum">
-              <a:rPr lang="en-US" smtClean="0"/>
+            <a:fld id="{023A53CF-6AA3-4EF6-9F05-A0E3059C583D}" type="slidenum">
+              <a:rPr lang="en-IN" smtClean="0"/>
               <a:t>‹#›</a:t>
             </a:fld>
-            <a:endParaRPr lang="en-US"/>
+            <a:endParaRPr lang="en-IN"/>
           </a:p>
         </p:txBody>
       </p:sp>
@@ -4335,7 +4249,7 @@
           <p:cNvPr id="8" name="Picture 7">
             <a:extLst>
               <a:ext uri="{FF2B5EF4-FFF2-40B4-BE49-F238E27FC236}">
-                <a16:creationId xmlns:a16="http://schemas.microsoft.com/office/drawing/2014/main" id="{9F3932AB-6107-98C9-CEDA-32A7DF597298}"/>
+                <a16:creationId xmlns:a16="http://schemas.microsoft.com/office/drawing/2014/main" id="{9ED41020-D2C1-2A7A-0E52-12FBDC02B9EA}"/>
               </a:ext>
             </a:extLst>
           </p:cNvPr>
@@ -4346,118 +4260,31 @@
         </p:nvPicPr>
         <p:blipFill>
           <a:blip r:embed="rId13">
-            <a:alphaModFix amt="50000"/>
+            <a:alphaModFix amt="68000"/>
             <a:extLst>
               <a:ext uri="{28A0092B-C50C-407E-A947-70E740481C1C}">
                 <a14:useLocalDpi xmlns:a14="http://schemas.microsoft.com/office/drawing/2010/main" val="0"/>
               </a:ext>
             </a:extLst>
           </a:blip>
-          <a:srcRect l="26008" t="39529" r="41606" b="46715"/>
           <a:stretch>
             <a:fillRect/>
           </a:stretch>
         </p:blipFill>
         <p:spPr>
           <a:xfrm>
-            <a:off x="212435" y="136524"/>
-            <a:ext cx="1330037" cy="1025209"/>
+            <a:off x="10857778" y="0"/>
+            <a:ext cx="1295581" cy="924054"/>
           </a:xfrm>
-          <a:prstGeom prst="ellipse">
+          <a:prstGeom prst="rect">
             <a:avLst/>
           </a:prstGeom>
-          <a:ln w="63500" cap="rnd">
-            <a:solidFill>
-              <a:srgbClr val="333333"/>
-            </a:solidFill>
-          </a:ln>
-          <a:effectLst>
-            <a:outerShdw blurRad="381000" dist="292100" dir="5400000" sx="-80000" sy="-18000" rotWithShape="0">
-              <a:srgbClr val="000000">
-                <a:alpha val="22000"/>
-              </a:srgbClr>
-            </a:outerShdw>
-          </a:effectLst>
-          <a:scene3d>
-            <a:camera prst="orthographicFront"/>
-            <a:lightRig rig="contrasting" dir="t">
-              <a:rot lat="0" lon="0" rev="3000000"/>
-            </a:lightRig>
-          </a:scene3d>
-          <a:sp3d contourW="7620">
-            <a:bevelT w="95250" h="31750"/>
-            <a:contourClr>
-              <a:srgbClr val="333333"/>
-            </a:contourClr>
-          </a:sp3d>
-        </p:spPr>
-      </p:pic>
-      <p:pic>
-        <p:nvPicPr>
-          <p:cNvPr id="7" name="Picture 6">
-            <a:extLst>
-              <a:ext uri="{FF2B5EF4-FFF2-40B4-BE49-F238E27FC236}">
-                <a16:creationId xmlns:a16="http://schemas.microsoft.com/office/drawing/2014/main" id="{2CA22C5A-FA6D-B699-950E-8D249A969331}"/>
-              </a:ext>
-            </a:extLst>
-          </p:cNvPr>
-          <p:cNvPicPr>
-            <a:picLocks noChangeAspect="1"/>
-          </p:cNvPicPr>
-          <p:nvPr userDrawn="1"/>
-        </p:nvPicPr>
-        <p:blipFill>
-          <a:blip r:embed="rId13">
-            <a:alphaModFix/>
-            <a:extLst>
-              <a:ext uri="{28A0092B-C50C-407E-A947-70E740481C1C}">
-                <a14:useLocalDpi xmlns:a14="http://schemas.microsoft.com/office/drawing/2010/main" val="0"/>
-              </a:ext>
-            </a:extLst>
-          </a:blip>
-          <a:srcRect l="26008" t="39529" r="41606" b="46715"/>
-          <a:stretch>
-            <a:fillRect/>
-          </a:stretch>
-        </p:blipFill>
-        <p:spPr>
-          <a:xfrm>
-            <a:off x="10855909" y="185738"/>
-            <a:ext cx="1123656" cy="866128"/>
-          </a:xfrm>
-          <a:prstGeom prst="ellipse">
-            <a:avLst/>
-          </a:prstGeom>
-          <a:ln w="63500" cap="rnd">
-            <a:solidFill>
-              <a:srgbClr val="333333"/>
-            </a:solidFill>
-          </a:ln>
-          <a:effectLst>
-            <a:outerShdw blurRad="381000" dist="292100" dir="5400000" sx="-80000" sy="-18000" rotWithShape="0">
-              <a:srgbClr val="000000">
-                <a:alpha val="22000"/>
-              </a:srgbClr>
-            </a:outerShdw>
-          </a:effectLst>
-          <a:scene3d>
-            <a:camera prst="orthographicFront"/>
-            <a:lightRig rig="contrasting" dir="t">
-              <a:rot lat="0" lon="0" rev="3000000"/>
-            </a:lightRig>
-          </a:scene3d>
-          <a:sp3d contourW="7620">
-            <a:bevelT w="95250" h="31750"/>
-            <a:contourClr>
-              <a:srgbClr val="333333"/>
-            </a:contourClr>
-          </a:sp3d>
         </p:spPr>
       </p:pic>
     </p:spTree>
     <p:extLst>
       <p:ext uri="{BB962C8B-B14F-4D97-AF65-F5344CB8AC3E}">
-        <p14:creationId xmlns:p14="http://schemas.microsoft.com/office/powerpoint/2010/main" val="1499973180"/>
+        <p14:creationId xmlns:p14="http://schemas.microsoft.com/office/powerpoint/2010/main" val="823822086"/>
       </p:ext>
     </p:extLst>
   </p:cSld>
@@ -4487,10 +4314,7 @@
         <a:buNone/>
         <a:defRPr sz="4400" kern="1200">
           <a:solidFill>
-            <a:schemeClr val="accent6">
-              <a:lumMod val="60000"/>
-              <a:lumOff val="40000"/>
-            </a:schemeClr>
+            <a:schemeClr val="tx1"/>
           </a:solidFill>
           <a:latin typeface="+mj-lt"/>
           <a:ea typeface="+mj-ea"/>
@@ -4510,10 +4334,7 @@
         <a:buChar char="•"/>
         <a:defRPr sz="2800" kern="1200">
           <a:solidFill>
-            <a:schemeClr val="accent6">
-              <a:lumMod val="60000"/>
-              <a:lumOff val="40000"/>
-            </a:schemeClr>
+            <a:schemeClr val="tx1"/>
           </a:solidFill>
           <a:latin typeface="+mn-lt"/>
           <a:ea typeface="+mn-ea"/>
@@ -4531,10 +4352,7 @@
         <a:buChar char="•"/>
         <a:defRPr sz="2400" kern="1200">
           <a:solidFill>
-            <a:schemeClr val="accent6">
-              <a:lumMod val="60000"/>
-              <a:lumOff val="40000"/>
-            </a:schemeClr>
+            <a:schemeClr val="tx1"/>
           </a:solidFill>
           <a:latin typeface="+mn-lt"/>
           <a:ea typeface="+mn-ea"/>
@@ -4552,10 +4370,7 @@
         <a:buChar char="•"/>
         <a:defRPr sz="2000" kern="1200">
           <a:solidFill>
-            <a:schemeClr val="accent6">
-              <a:lumMod val="60000"/>
-              <a:lumOff val="40000"/>
-            </a:schemeClr>
+            <a:schemeClr val="tx1"/>
           </a:solidFill>
           <a:latin typeface="+mn-lt"/>
           <a:ea typeface="+mn-ea"/>
@@ -4573,10 +4388,7 @@
         <a:buChar char="•"/>
         <a:defRPr sz="1800" kern="1200">
           <a:solidFill>
-            <a:schemeClr val="accent6">
-              <a:lumMod val="60000"/>
-              <a:lumOff val="40000"/>
-            </a:schemeClr>
+            <a:schemeClr val="tx1"/>
           </a:solidFill>
           <a:latin typeface="+mn-lt"/>
           <a:ea typeface="+mn-ea"/>
@@ -4594,10 +4406,7 @@
         <a:buChar char="•"/>
         <a:defRPr sz="1800" kern="1200">
           <a:solidFill>
-            <a:schemeClr val="accent6">
-              <a:lumMod val="60000"/>
-              <a:lumOff val="40000"/>
-            </a:schemeClr>
+            <a:schemeClr val="tx1"/>
           </a:solidFill>
           <a:latin typeface="+mn-lt"/>
           <a:ea typeface="+mn-ea"/>
@@ -4807,8 +4616,8 @@
         </p:nvSpPr>
         <p:spPr>
           <a:xfrm>
-            <a:off x="477520" y="1003776"/>
-            <a:ext cx="10292080" cy="461665"/>
+            <a:off x="949960" y="1936464"/>
+            <a:ext cx="10292080" cy="1107996"/>
           </a:xfrm>
           <a:prstGeom prst="rect">
             <a:avLst/>
@@ -4821,11 +4630,11 @@
           </a:bodyPr>
           <a:lstStyle/>
           <a:p>
-            <a:pPr>
+            <a:pPr algn="ctr">
               <a:buNone/>
             </a:pPr>
             <a:r>
-              <a:rPr lang="en-US" sz="2400" b="1" dirty="0">
+              <a:rPr lang="en-US" sz="6600" b="1" dirty="0">
                 <a:solidFill>
                   <a:schemeClr val="accent6">
                     <a:lumMod val="60000"/>
@@ -4835,7 +4644,7 @@
               </a:rPr>
               <a:t>Chunking</a:t>
             </a:r>
-            <a:endParaRPr lang="en-US" sz="2400" dirty="0">
+            <a:endParaRPr lang="en-US" sz="6600" dirty="0">
               <a:solidFill>
                 <a:schemeClr val="accent6">
                   <a:lumMod val="60000"/>
@@ -5877,8 +5686,8 @@
           </a:prstGeom>
         </p:spPr>
       </p:pic>
-      <mc:AlternateContent xmlns:mc="http://schemas.openxmlformats.org/markup-compatibility/2006">
-        <mc:Choice xmlns:p14="http://schemas.microsoft.com/office/powerpoint/2010/main" Requires="p14">
+      <mc:AlternateContent xmlns:mc="http://schemas.openxmlformats.org/markup-compatibility/2006" xmlns:p14="http://schemas.microsoft.com/office/powerpoint/2010/main">
+        <mc:Choice Requires="p14">
           <p:contentPart p14:bwMode="auto" r:id="rId3">
             <p14:nvContentPartPr>
               <p14:cNvPr id="4" name="Ink 3">
@@ -5897,7 +5706,7 @@
             </p14:xfrm>
           </p:contentPart>
         </mc:Choice>
-        <mc:Fallback>
+        <mc:Fallback xmlns="">
           <p:pic>
             <p:nvPicPr>
               <p:cNvPr id="4" name="Ink 3">
@@ -6041,8 +5850,8 @@
             <a:chExt cx="828000" cy="309240"/>
           </a:xfrm>
         </p:grpSpPr>
-        <mc:AlternateContent xmlns:mc="http://schemas.openxmlformats.org/markup-compatibility/2006">
-          <mc:Choice xmlns:p14="http://schemas.microsoft.com/office/powerpoint/2010/main" Requires="p14">
+        <mc:AlternateContent xmlns:mc="http://schemas.openxmlformats.org/markup-compatibility/2006" xmlns:p14="http://schemas.microsoft.com/office/powerpoint/2010/main">
+          <mc:Choice Requires="p14">
             <p:contentPart p14:bwMode="auto" r:id="rId7">
               <p14:nvContentPartPr>
                 <p14:cNvPr id="10" name="Ink 9">
@@ -6061,7 +5870,7 @@
               </p14:xfrm>
             </p:contentPart>
           </mc:Choice>
-          <mc:Fallback>
+          <mc:Fallback xmlns="">
             <p:pic>
               <p:nvPicPr>
                 <p:cNvPr id="10" name="Ink 9">
@@ -6092,8 +5901,8 @@
             </p:pic>
           </mc:Fallback>
         </mc:AlternateContent>
-        <mc:AlternateContent xmlns:mc="http://schemas.openxmlformats.org/markup-compatibility/2006">
-          <mc:Choice xmlns:p14="http://schemas.microsoft.com/office/powerpoint/2010/main" Requires="p14">
+        <mc:AlternateContent xmlns:mc="http://schemas.openxmlformats.org/markup-compatibility/2006" xmlns:p14="http://schemas.microsoft.com/office/powerpoint/2010/main">
+          <mc:Choice Requires="p14">
             <p:contentPart p14:bwMode="auto" r:id="rId9">
               <p14:nvContentPartPr>
                 <p14:cNvPr id="11" name="Ink 10">
@@ -6112,7 +5921,7 @@
               </p14:xfrm>
             </p:contentPart>
           </mc:Choice>
-          <mc:Fallback>
+          <mc:Fallback xmlns="">
             <p:pic>
               <p:nvPicPr>
                 <p:cNvPr id="11" name="Ink 10">
@@ -6272,10 +6081,30 @@
                   </a:schemeClr>
                 </a:solidFill>
               </a:rPr>
-              <a:t>Artificial Intelligence is transforming industries. It is widely used in healthcare.</a:t>
-            </a:r>
-          </a:p>
-          <a:p>
+              <a:t>Artificial Intelligence is transforming industries. It is widely used in </a:t>
+            </a:r>
+            <a:r>
+              <a:rPr lang="en-US" sz="2400" i="1">
+                <a:solidFill>
+                  <a:schemeClr val="accent4">
+                    <a:lumMod val="75000"/>
+                  </a:schemeClr>
+                </a:solidFill>
+              </a:rPr>
+              <a:t>healthcare.</a:t>
+            </a:r>
+          </a:p>
+          <a:p>
+            <a:r>
+              <a:rPr lang="en-US" sz="2400" i="1">
+                <a:solidFill>
+                  <a:schemeClr val="accent4">
+                    <a:lumMod val="75000"/>
+                  </a:schemeClr>
+                </a:solidFill>
+              </a:rPr>
+              <a:t>Doctors </a:t>
+            </a:r>
             <a:r>
               <a:rPr lang="en-US" sz="2400" i="1" dirty="0">
                 <a:solidFill>
@@ -6284,7 +6113,7 @@
                   </a:schemeClr>
                 </a:solidFill>
               </a:rPr>
-              <a:t>Doctors use AI to diagnose diseases. They are using it to detect cancer.</a:t>
+              <a:t>use AI to diagnose diseases. They are using it to detect cancer.</a:t>
             </a:r>
           </a:p>
           <a:p>
@@ -6370,8 +6199,8 @@
           </a:p>
         </p:txBody>
       </p:sp>
-      <mc:AlternateContent xmlns:mc="http://schemas.openxmlformats.org/markup-compatibility/2006">
-        <mc:Choice xmlns:p14="http://schemas.microsoft.com/office/powerpoint/2010/main" Requires="p14">
+      <mc:AlternateContent xmlns:mc="http://schemas.openxmlformats.org/markup-compatibility/2006" xmlns:p14="http://schemas.microsoft.com/office/powerpoint/2010/main">
+        <mc:Choice Requires="p14">
           <p:contentPart p14:bwMode="auto" r:id="rId2">
             <p14:nvContentPartPr>
               <p14:cNvPr id="4" name="Ink 3">
@@ -6390,7 +6219,7 @@
             </p14:xfrm>
           </p:contentPart>
         </mc:Choice>
-        <mc:Fallback>
+        <mc:Fallback xmlns="">
           <p:pic>
             <p:nvPicPr>
               <p:cNvPr id="4" name="Ink 3">
@@ -6421,8 +6250,8 @@
           </p:pic>
         </mc:Fallback>
       </mc:AlternateContent>
-      <mc:AlternateContent xmlns:mc="http://schemas.openxmlformats.org/markup-compatibility/2006">
-        <mc:Choice xmlns:p14="http://schemas.microsoft.com/office/powerpoint/2010/main" Requires="p14">
+      <mc:AlternateContent xmlns:mc="http://schemas.openxmlformats.org/markup-compatibility/2006" xmlns:p14="http://schemas.microsoft.com/office/powerpoint/2010/main">
+        <mc:Choice Requires="p14">
           <p:contentPart p14:bwMode="auto" r:id="rId4">
             <p14:nvContentPartPr>
               <p14:cNvPr id="11" name="Ink 10">
@@ -6441,7 +6270,7 @@
             </p14:xfrm>
           </p:contentPart>
         </mc:Choice>
-        <mc:Fallback>
+        <mc:Fallback xmlns="">
           <p:pic>
             <p:nvPicPr>
               <p:cNvPr id="11" name="Ink 10">
@@ -6487,7 +6316,7 @@
               <p14:nvPr/>
             </p14:nvContentPartPr>
             <p14:xfrm>
-              <a:off x="9664043" y="4871476"/>
+              <a:off x="9471623" y="4871475"/>
               <a:ext cx="384840" cy="915120"/>
             </p14:xfrm>
           </p:contentPart>
@@ -6513,7 +6342,7 @@
             </p:blipFill>
             <p:spPr>
               <a:xfrm>
-                <a:off x="9628043" y="4835462"/>
+                <a:off x="9435623" y="4835461"/>
                 <a:ext cx="456480" cy="986788"/>
               </a:xfrm>
               <a:prstGeom prst="rect">
@@ -6537,8 +6366,8 @@
         </p:nvSpPr>
         <p:spPr>
           <a:xfrm>
-            <a:off x="10303750" y="1494637"/>
-            <a:ext cx="1608356" cy="461665"/>
+            <a:off x="9664043" y="1494637"/>
+            <a:ext cx="2248063" cy="830997"/>
           </a:xfrm>
           <a:prstGeom prst="rect">
             <a:avLst/>
@@ -6560,8 +6389,40 @@
                   </a:schemeClr>
                 </a:solidFill>
               </a:rPr>
-              <a:t> Chunk 1</a:t>
-            </a:r>
+              <a:t> </a:t>
+            </a:r>
+            <a:r>
+              <a:rPr lang="en-US" sz="2400" b="1">
+                <a:solidFill>
+                  <a:schemeClr val="accent4">
+                    <a:lumMod val="60000"/>
+                    <a:lumOff val="40000"/>
+                  </a:schemeClr>
+                </a:solidFill>
+              </a:rPr>
+              <a:t>Chunk 1</a:t>
+            </a:r>
+          </a:p>
+          <a:p>
+            <a:r>
+              <a:rPr lang="en-US" sz="2400" b="1">
+                <a:solidFill>
+                  <a:schemeClr val="accent4">
+                    <a:lumMod val="60000"/>
+                    <a:lumOff val="40000"/>
+                  </a:schemeClr>
+                </a:solidFill>
+              </a:rPr>
+              <a:t>(Talks about AI)</a:t>
+            </a:r>
+            <a:endParaRPr lang="en-US" sz="2400" b="1" dirty="0">
+              <a:solidFill>
+                <a:schemeClr val="accent4">
+                  <a:lumMod val="60000"/>
+                  <a:lumOff val="40000"/>
+                </a:schemeClr>
+              </a:solidFill>
+            </a:endParaRPr>
           </a:p>
         </p:txBody>
       </p:sp>
@@ -6579,8 +6440,8 @@
         </p:nvSpPr>
         <p:spPr>
           <a:xfrm>
-            <a:off x="10303750" y="2848320"/>
-            <a:ext cx="1608356" cy="461665"/>
+            <a:off x="9381744" y="2848320"/>
+            <a:ext cx="2715408" cy="830997"/>
           </a:xfrm>
           <a:prstGeom prst="rect">
             <a:avLst/>
@@ -6602,8 +6463,40 @@
                   </a:schemeClr>
                 </a:solidFill>
               </a:rPr>
-              <a:t> Chunk 2</a:t>
-            </a:r>
+              <a:t> </a:t>
+            </a:r>
+            <a:r>
+              <a:rPr lang="en-US" sz="2400" b="1">
+                <a:solidFill>
+                  <a:schemeClr val="accent4">
+                    <a:lumMod val="60000"/>
+                    <a:lumOff val="40000"/>
+                  </a:schemeClr>
+                </a:solidFill>
+              </a:rPr>
+              <a:t>Chunk 2</a:t>
+            </a:r>
+          </a:p>
+          <a:p>
+            <a:r>
+              <a:rPr lang="en-US" sz="2400" b="1">
+                <a:solidFill>
+                  <a:schemeClr val="accent4">
+                    <a:lumMod val="60000"/>
+                    <a:lumOff val="40000"/>
+                  </a:schemeClr>
+                </a:solidFill>
+              </a:rPr>
+              <a:t>(Talks about sports)</a:t>
+            </a:r>
+            <a:endParaRPr lang="en-US" sz="2400" b="1" dirty="0">
+              <a:solidFill>
+                <a:schemeClr val="accent4">
+                  <a:lumMod val="60000"/>
+                  <a:lumOff val="40000"/>
+                </a:schemeClr>
+              </a:solidFill>
+            </a:endParaRPr>
           </a:p>
         </p:txBody>
       </p:sp>
@@ -6621,8 +6514,8 @@
         </p:nvSpPr>
         <p:spPr>
           <a:xfrm>
-            <a:off x="10303750" y="5098203"/>
-            <a:ext cx="1608356" cy="461665"/>
+            <a:off x="9856463" y="4728871"/>
+            <a:ext cx="2240329" cy="1200329"/>
           </a:xfrm>
           <a:prstGeom prst="rect">
             <a:avLst/>
@@ -6644,13 +6537,45 @@
                   </a:schemeClr>
                 </a:solidFill>
               </a:rPr>
-              <a:t> Chunk 3</a:t>
-            </a:r>
-          </a:p>
-        </p:txBody>
-      </p:sp>
-      <mc:AlternateContent xmlns:mc="http://schemas.openxmlformats.org/markup-compatibility/2006">
-        <mc:Choice xmlns:p14="http://schemas.microsoft.com/office/powerpoint/2010/main" Requires="p14">
+              <a:t> </a:t>
+            </a:r>
+            <a:r>
+              <a:rPr lang="en-US" sz="2400" b="1">
+                <a:solidFill>
+                  <a:schemeClr val="accent4">
+                    <a:lumMod val="60000"/>
+                    <a:lumOff val="40000"/>
+                  </a:schemeClr>
+                </a:solidFill>
+              </a:rPr>
+              <a:t>Chunk 3</a:t>
+            </a:r>
+          </a:p>
+          <a:p>
+            <a:r>
+              <a:rPr lang="en-US" sz="2400" b="1">
+                <a:solidFill>
+                  <a:schemeClr val="accent4">
+                    <a:lumMod val="60000"/>
+                    <a:lumOff val="40000"/>
+                  </a:schemeClr>
+                </a:solidFill>
+              </a:rPr>
+              <a:t>(Talks about data)</a:t>
+            </a:r>
+            <a:endParaRPr lang="en-US" sz="2400" b="1" dirty="0">
+              <a:solidFill>
+                <a:schemeClr val="accent4">
+                  <a:lumMod val="60000"/>
+                  <a:lumOff val="40000"/>
+                </a:schemeClr>
+              </a:solidFill>
+            </a:endParaRPr>
+          </a:p>
+        </p:txBody>
+      </p:sp>
+      <mc:AlternateContent xmlns:mc="http://schemas.openxmlformats.org/markup-compatibility/2006" xmlns:p14="http://schemas.microsoft.com/office/powerpoint/2010/main">
+        <mc:Choice Requires="p14">
           <p:contentPart p14:bwMode="auto" r:id="rId8">
             <p14:nvContentPartPr>
               <p14:cNvPr id="23" name="Ink 22">
@@ -6669,7 +6594,7 @@
             </p14:xfrm>
           </p:contentPart>
         </mc:Choice>
-        <mc:Fallback>
+        <mc:Fallback xmlns="">
           <p:pic>
             <p:nvPicPr>
               <p:cNvPr id="23" name="Ink 22">
@@ -6878,9 +6803,8 @@
             <a:r>
               <a:rPr lang="en-US" sz="2000" b="0" i="0" dirty="0">
                 <a:solidFill>
-                  <a:schemeClr val="accent6">
-                    <a:lumMod val="60000"/>
-                    <a:lumOff val="40000"/>
+                  <a:schemeClr val="accent4">
+                    <a:lumMod val="75000"/>
                   </a:schemeClr>
                 </a:solidFill>
                 <a:effectLst/>
@@ -6898,9 +6822,8 @@
             </a:pPr>
             <a:endParaRPr lang="en-US" sz="2000" b="0" i="0" dirty="0">
               <a:solidFill>
-                <a:schemeClr val="accent6">
-                  <a:lumMod val="60000"/>
-                  <a:lumOff val="40000"/>
+                <a:schemeClr val="accent4">
+                  <a:lumMod val="75000"/>
                 </a:schemeClr>
               </a:solidFill>
               <a:effectLst/>
@@ -6916,9 +6839,8 @@
             </a:pPr>
             <a:endParaRPr lang="en-US" sz="2000" b="0" i="0" dirty="0">
               <a:solidFill>
-                <a:schemeClr val="accent6">
-                  <a:lumMod val="60000"/>
-                  <a:lumOff val="40000"/>
+                <a:schemeClr val="accent4">
+                  <a:lumMod val="75000"/>
                 </a:schemeClr>
               </a:solidFill>
               <a:effectLst/>
@@ -6935,9 +6857,8 @@
             <a:r>
               <a:rPr lang="en-US" sz="2000" b="0" i="0" dirty="0">
                 <a:solidFill>
-                  <a:schemeClr val="accent6">
-                    <a:lumMod val="60000"/>
-                    <a:lumOff val="40000"/>
+                  <a:schemeClr val="accent4">
+                    <a:lumMod val="75000"/>
                   </a:schemeClr>
                 </a:solidFill>
                 <a:effectLst/>
@@ -6955,9 +6876,8 @@
             </a:pPr>
             <a:endParaRPr lang="en-US" sz="2000" b="0" i="0" dirty="0">
               <a:solidFill>
-                <a:schemeClr val="accent6">
-                  <a:lumMod val="60000"/>
-                  <a:lumOff val="40000"/>
+                <a:schemeClr val="accent4">
+                  <a:lumMod val="75000"/>
                 </a:schemeClr>
               </a:solidFill>
               <a:effectLst/>
@@ -6973,9 +6893,8 @@
             </a:pPr>
             <a:endParaRPr lang="en-US" sz="2000" b="0" i="0" dirty="0">
               <a:solidFill>
-                <a:schemeClr val="accent6">
-                  <a:lumMod val="60000"/>
-                  <a:lumOff val="40000"/>
+                <a:schemeClr val="accent4">
+                  <a:lumMod val="75000"/>
                 </a:schemeClr>
               </a:solidFill>
               <a:effectLst/>
@@ -6992,9 +6911,8 @@
             <a:r>
               <a:rPr lang="en-US" sz="2000" b="0" i="0" dirty="0">
                 <a:solidFill>
-                  <a:schemeClr val="accent6">
-                    <a:lumMod val="60000"/>
-                    <a:lumOff val="40000"/>
+                  <a:schemeClr val="accent4">
+                    <a:lumMod val="75000"/>
                   </a:schemeClr>
                 </a:solidFill>
                 <a:effectLst/>
@@ -7056,8 +6974,8 @@
           </p:pic>
         </mc:Fallback>
       </mc:AlternateContent>
-      <mc:AlternateContent xmlns:mc="http://schemas.openxmlformats.org/markup-compatibility/2006">
-        <mc:Choice xmlns:p14="http://schemas.microsoft.com/office/powerpoint/2010/main" Requires="p14">
+      <mc:AlternateContent xmlns:mc="http://schemas.openxmlformats.org/markup-compatibility/2006" xmlns:p14="http://schemas.microsoft.com/office/powerpoint/2010/main">
+        <mc:Choice Requires="p14">
           <p:contentPart p14:bwMode="auto" r:id="rId4">
             <p14:nvContentPartPr>
               <p14:cNvPr id="22" name="Ink 21">
@@ -7076,7 +6994,7 @@
             </p14:xfrm>
           </p:contentPart>
         </mc:Choice>
-        <mc:Fallback>
+        <mc:Fallback xmlns="">
           <p:pic>
             <p:nvPicPr>
               <p:cNvPr id="22" name="Ink 21">
@@ -7107,8 +7025,8 @@
           </p:pic>
         </mc:Fallback>
       </mc:AlternateContent>
-      <mc:AlternateContent xmlns:mc="http://schemas.openxmlformats.org/markup-compatibility/2006">
-        <mc:Choice xmlns:p14="http://schemas.microsoft.com/office/powerpoint/2010/main" Requires="p14">
+      <mc:AlternateContent xmlns:mc="http://schemas.openxmlformats.org/markup-compatibility/2006" xmlns:p14="http://schemas.microsoft.com/office/powerpoint/2010/main">
+        <mc:Choice Requires="p14">
           <p:contentPart p14:bwMode="auto" r:id="rId6">
             <p14:nvContentPartPr>
               <p14:cNvPr id="27" name="Ink 26">
@@ -7127,7 +7045,7 @@
             </p14:xfrm>
           </p:contentPart>
         </mc:Choice>
-        <mc:Fallback>
+        <mc:Fallback xmlns="">
           <p:pic>
             <p:nvPicPr>
               <p:cNvPr id="27" name="Ink 26">
@@ -8860,299 +8778,4 @@
     </a:ext>
   </a:extLst>
 </a:theme>
-</file>
-
-<file path=ppt/theme/theme3.xml><?xml version="1.0" encoding="utf-8"?>
-<a:theme xmlns:a="http://schemas.openxmlformats.org/drawingml/2006/main" name="Office Theme">
-  <a:themeElements>
-    <a:clrScheme name="Office">
-      <a:dk1>
-        <a:sysClr val="windowText" lastClr="000000"/>
-      </a:dk1>
-      <a:lt1>
-        <a:sysClr val="window" lastClr="FFFFFF"/>
-      </a:lt1>
-      <a:dk2>
-        <a:srgbClr val="44546A"/>
-      </a:dk2>
-      <a:lt2>
-        <a:srgbClr val="E7E6E6"/>
-      </a:lt2>
-      <a:accent1>
-        <a:srgbClr val="4472C4"/>
-      </a:accent1>
-      <a:accent2>
-        <a:srgbClr val="ED7D31"/>
-      </a:accent2>
-      <a:accent3>
-        <a:srgbClr val="A5A5A5"/>
-      </a:accent3>
-      <a:accent4>
-        <a:srgbClr val="FFC000"/>
-      </a:accent4>
-      <a:accent5>
-        <a:srgbClr val="5B9BD5"/>
-      </a:accent5>
-      <a:accent6>
-        <a:srgbClr val="70AD47"/>
-      </a:accent6>
-      <a:hlink>
-        <a:srgbClr val="0563C1"/>
-      </a:hlink>
-      <a:folHlink>
-        <a:srgbClr val="954F72"/>
-      </a:folHlink>
-    </a:clrScheme>
-    <a:fontScheme name="Office">
-      <a:majorFont>
-        <a:latin typeface="Calibri Light" panose="020F0302020204030204"/>
-        <a:ea typeface=""/>
-        <a:cs typeface=""/>
-        <a:font script="Jpan" typeface="游ゴシック Light"/>
-        <a:font script="Hang" typeface="맑은 고딕"/>
-        <a:font script="Hans" typeface="等线 Light"/>
-        <a:font script="Hant" typeface="新細明體"/>
-        <a:font script="Arab" typeface="Times New Roman"/>
-        <a:font script="Hebr" typeface="Times New Roman"/>
-        <a:font script="Thai" typeface="Angsana New"/>
-        <a:font script="Ethi" typeface="Nyala"/>
-        <a:font script="Beng" typeface="Vrinda"/>
-        <a:font script="Gujr" typeface="Shruti"/>
-        <a:font script="Khmr" typeface="MoolBoran"/>
-        <a:font script="Knda" typeface="Tunga"/>
-        <a:font script="Guru" typeface="Raavi"/>
-        <a:font script="Cans" typeface="Euphemia"/>
-        <a:font script="Cher" typeface="Plantagenet Cherokee"/>
-        <a:font script="Yiii" typeface="Microsoft Yi Baiti"/>
-        <a:font script="Tibt" typeface="Microsoft Himalaya"/>
-        <a:font script="Thaa" typeface="MV Boli"/>
-        <a:font script="Deva" typeface="Mangal"/>
-        <a:font script="Telu" typeface="Gautami"/>
-        <a:font script="Taml" typeface="Latha"/>
-        <a:font script="Syrc" typeface="Estrangelo Edessa"/>
-        <a:font script="Orya" typeface="Kalinga"/>
-        <a:font script="Mlym" typeface="Kartika"/>
-        <a:font script="Laoo" typeface="DokChampa"/>
-        <a:font script="Sinh" typeface="Iskoola Pota"/>
-        <a:font script="Mong" typeface="Mongolian Baiti"/>
-        <a:font script="Viet" typeface="Times New Roman"/>
-        <a:font script="Uigh" typeface="Microsoft Uighur"/>
-        <a:font script="Geor" typeface="Sylfaen"/>
-        <a:font script="Armn" typeface="Arial"/>
-        <a:font script="Bugi" typeface="Leelawadee UI"/>
-        <a:font script="Bopo" typeface="Microsoft JhengHei"/>
-        <a:font script="Java" typeface="Javanese Text"/>
-        <a:font script="Lisu" typeface="Segoe UI"/>
-        <a:font script="Mymr" typeface="Myanmar Text"/>
-        <a:font script="Nkoo" typeface="Ebrima"/>
-        <a:font script="Olck" typeface="Nirmala UI"/>
-        <a:font script="Osma" typeface="Ebrima"/>
-        <a:font script="Phag" typeface="Phagspa"/>
-        <a:font script="Syrn" typeface="Estrangelo Edessa"/>
-        <a:font script="Syrj" typeface="Estrangelo Edessa"/>
-        <a:font script="Syre" typeface="Estrangelo Edessa"/>
-        <a:font script="Sora" typeface="Nirmala UI"/>
-        <a:font script="Tale" typeface="Microsoft Tai Le"/>
-        <a:font script="Talu" typeface="Microsoft New Tai Lue"/>
-        <a:font script="Tfng" typeface="Ebrima"/>
-      </a:majorFont>
-      <a:minorFont>
-        <a:latin typeface="Calibri" panose="020F0502020204030204"/>
-        <a:ea typeface=""/>
-        <a:cs typeface=""/>
-        <a:font script="Jpan" typeface="游ゴシック"/>
-        <a:font script="Hang" typeface="맑은 고딕"/>
-        <a:font script="Hans" typeface="等线"/>
-        <a:font script="Hant" typeface="新細明體"/>
-        <a:font script="Arab" typeface="Arial"/>
-        <a:font script="Hebr" typeface="Arial"/>
-        <a:font script="Thai" typeface="Cordia New"/>
-        <a:font script="Ethi" typeface="Nyala"/>
-        <a:font script="Beng" typeface="Vrinda"/>
-        <a:font script="Gujr" typeface="Shruti"/>
-        <a:font script="Khmr" typeface="DaunPenh"/>
-        <a:font script="Knda" typeface="Tunga"/>
-        <a:font script="Guru" typeface="Raavi"/>
-        <a:font script="Cans" typeface="Euphemia"/>
-        <a:font script="Cher" typeface="Plantagenet Cherokee"/>
-        <a:font script="Yiii" typeface="Microsoft Yi Baiti"/>
-        <a:font script="Tibt" typeface="Microsoft Himalaya"/>
-        <a:font script="Thaa" typeface="MV Boli"/>
-        <a:font script="Deva" typeface="Mangal"/>
-        <a:font script="Telu" typeface="Gautami"/>
-        <a:font script="Taml" typeface="Latha"/>
-        <a:font script="Syrc" typeface="Estrangelo Edessa"/>
-        <a:font script="Orya" typeface="Kalinga"/>
-        <a:font script="Mlym" typeface="Kartika"/>
-        <a:font script="Laoo" typeface="DokChampa"/>
-        <a:font script="Sinh" typeface="Iskoola Pota"/>
-        <a:font script="Mong" typeface="Mongolian Baiti"/>
-        <a:font script="Viet" typeface="Arial"/>
-        <a:font script="Uigh" typeface="Microsoft Uighur"/>
-        <a:font script="Geor" typeface="Sylfaen"/>
-        <a:font script="Armn" typeface="Arial"/>
-        <a:font script="Bugi" typeface="Leelawadee UI"/>
-        <a:font script="Bopo" typeface="Microsoft JhengHei"/>
-        <a:font script="Java" typeface="Javanese Text"/>
-        <a:font script="Lisu" typeface="Segoe UI"/>
-        <a:font script="Mymr" typeface="Myanmar Text"/>
-        <a:font script="Nkoo" typeface="Ebrima"/>
-        <a:font script="Olck" typeface="Nirmala UI"/>
-        <a:font script="Osma" typeface="Ebrima"/>
-        <a:font script="Phag" typeface="Phagspa"/>
-        <a:font script="Syrn" typeface="Estrangelo Edessa"/>
-        <a:font script="Syrj" typeface="Estrangelo Edessa"/>
-        <a:font script="Syre" typeface="Estrangelo Edessa"/>
-        <a:font script="Sora" typeface="Nirmala UI"/>
-        <a:font script="Tale" typeface="Microsoft Tai Le"/>
-        <a:font script="Talu" typeface="Microsoft New Tai Lue"/>
-        <a:font script="Tfng" typeface="Ebrima"/>
-      </a:minorFont>
-    </a:fontScheme>
-    <a:fmtScheme name="Office">
-      <a:fillStyleLst>
-        <a:solidFill>
-          <a:schemeClr val="phClr"/>
-        </a:solidFill>
-        <a:gradFill rotWithShape="1">
-          <a:gsLst>
-            <a:gs pos="0">
-              <a:schemeClr val="phClr">
-                <a:lumMod val="110000"/>
-                <a:satMod val="105000"/>
-                <a:tint val="67000"/>
-              </a:schemeClr>
-            </a:gs>
-            <a:gs pos="50000">
-              <a:schemeClr val="phClr">
-                <a:lumMod val="105000"/>
-                <a:satMod val="103000"/>
-                <a:tint val="73000"/>
-              </a:schemeClr>
-            </a:gs>
-            <a:gs pos="100000">
-              <a:schemeClr val="phClr">
-                <a:lumMod val="105000"/>
-                <a:satMod val="109000"/>
-                <a:tint val="81000"/>
-              </a:schemeClr>
-            </a:gs>
-          </a:gsLst>
-          <a:lin ang="5400000" scaled="0"/>
-        </a:gradFill>
-        <a:gradFill rotWithShape="1">
-          <a:gsLst>
-            <a:gs pos="0">
-              <a:schemeClr val="phClr">
-                <a:satMod val="103000"/>
-                <a:lumMod val="102000"/>
-                <a:tint val="94000"/>
-              </a:schemeClr>
-            </a:gs>
-            <a:gs pos="50000">
-              <a:schemeClr val="phClr">
-                <a:satMod val="110000"/>
-                <a:lumMod val="100000"/>
-                <a:shade val="100000"/>
-              </a:schemeClr>
-            </a:gs>
-            <a:gs pos="100000">
-              <a:schemeClr val="phClr">
-                <a:lumMod val="99000"/>
-                <a:satMod val="120000"/>
-                <a:shade val="78000"/>
-              </a:schemeClr>
-            </a:gs>
-          </a:gsLst>
-          <a:lin ang="5400000" scaled="0"/>
-        </a:gradFill>
-      </a:fillStyleLst>
-      <a:lnStyleLst>
-        <a:ln w="6350" cap="flat" cmpd="sng" algn="ctr">
-          <a:solidFill>
-            <a:schemeClr val="phClr"/>
-          </a:solidFill>
-          <a:prstDash val="solid"/>
-          <a:miter lim="800000"/>
-        </a:ln>
-        <a:ln w="12700" cap="flat" cmpd="sng" algn="ctr">
-          <a:solidFill>
-            <a:schemeClr val="phClr"/>
-          </a:solidFill>
-          <a:prstDash val="solid"/>
-          <a:miter lim="800000"/>
-        </a:ln>
-        <a:ln w="19050" cap="flat" cmpd="sng" algn="ctr">
-          <a:solidFill>
-            <a:schemeClr val="phClr"/>
-          </a:solidFill>
-          <a:prstDash val="solid"/>
-          <a:miter lim="800000"/>
-        </a:ln>
-      </a:lnStyleLst>
-      <a:effectStyleLst>
-        <a:effectStyle>
-          <a:effectLst/>
-        </a:effectStyle>
-        <a:effectStyle>
-          <a:effectLst/>
-        </a:effectStyle>
-        <a:effectStyle>
-          <a:effectLst>
-            <a:outerShdw blurRad="57150" dist="19050" dir="5400000" algn="ctr" rotWithShape="0">
-              <a:srgbClr val="000000">
-                <a:alpha val="63000"/>
-              </a:srgbClr>
-            </a:outerShdw>
-          </a:effectLst>
-        </a:effectStyle>
-      </a:effectStyleLst>
-      <a:bgFillStyleLst>
-        <a:solidFill>
-          <a:schemeClr val="phClr"/>
-        </a:solidFill>
-        <a:solidFill>
-          <a:schemeClr val="phClr">
-            <a:tint val="95000"/>
-            <a:satMod val="170000"/>
-          </a:schemeClr>
-        </a:solidFill>
-        <a:gradFill rotWithShape="1">
-          <a:gsLst>
-            <a:gs pos="0">
-              <a:schemeClr val="phClr">
-                <a:tint val="93000"/>
-                <a:satMod val="150000"/>
-                <a:shade val="98000"/>
-                <a:lumMod val="102000"/>
-              </a:schemeClr>
-            </a:gs>
-            <a:gs pos="50000">
-              <a:schemeClr val="phClr">
-                <a:tint val="98000"/>
-                <a:satMod val="130000"/>
-                <a:shade val="90000"/>
-                <a:lumMod val="103000"/>
-              </a:schemeClr>
-            </a:gs>
-            <a:gs pos="100000">
-              <a:schemeClr val="phClr">
-                <a:shade val="63000"/>
-                <a:satMod val="120000"/>
-              </a:schemeClr>
-            </a:gs>
-          </a:gsLst>
-          <a:lin ang="5400000" scaled="0"/>
-        </a:gradFill>
-      </a:bgFillStyleLst>
-    </a:fmtScheme>
-  </a:themeElements>
-  <a:objectDefaults/>
-  <a:extraClrSchemeLst/>
-  <a:extLst>
-    <a:ext uri="{05A4C25C-085E-4340-85A3-A5531E510DB2}">
-      <thm15:themeFamily xmlns:thm15="http://schemas.microsoft.com/office/thememl/2012/main" name="Office Theme" id="{62F939B6-93AF-4DB8-9C6B-D6C7DFDC589F}" vid="{4A3C46E8-61CC-4603-A589-7422A47A8E4A}"/>
-    </a:ext>
-  </a:extLst>
-</a:theme>
 </file>